--- a/reports/MN-BO组会报告.pptx
+++ b/reports/MN-BO组会报告.pptx
@@ -4,6 +4,9 @@
   <p:sldMasterIdLst>
     <p:sldMasterId id="2147483648" r:id="rId1"/>
   </p:sldMasterIdLst>
+  <p:notesMasterIdLst>
+    <p:notesMasterId r:id="rId12"/>
+  </p:notesMasterIdLst>
   <p:sldIdLst>
     <p:sldId id="256" r:id="rId2"/>
     <p:sldId id="257" r:id="rId3"/>
@@ -16,10 +19,7 @@
     <p:sldId id="264" r:id="rId10"/>
     <p:sldId id="265" r:id="rId11"/>
   </p:sldIdLst>
-  <p:notesMasterIdLst>
-    <p:notesMasterId r:id="rId12"/>
-  </p:notesMasterIdLst>
-  <p:sldSz cx="9144000" cy="5143500"/>
+  <p:sldSz cx="9144000" cy="5143500" type="screen16x9"/>
   <p:notesSz cx="5143500" cy="9144000"/>
   <p:defaultTextStyle>
     <a:lvl1pPr marL="0" algn="l" defTabSz="914400" rtl="0" eaLnBrk="1" latinLnBrk="0" hangingPunct="1">
@@ -113,6 +113,11 @@
       </a:defRPr>
     </a:lvl9pPr>
   </p:defaultTextStyle>
+  <p:extLst>
+    <p:ext uri="{EFAFB233-063F-42B5-8137-9DF3F51BA10A}">
+      <p15:sldGuideLst xmlns:p15="http://schemas.microsoft.com/office/powerpoint/2012/main"/>
+    </p:ext>
+  </p:extLst>
 </p:presentation>
 </file>
 
@@ -138,234 +143,10 @@
           <a:chExt cx="0" cy="0"/>
         </a:xfrm>
       </p:grpSpPr>
-      <p:sp>
-        <p:nvSpPr>
-          <p:cNvPr id="2" name="Header Placeholder 1"/>
-          <p:cNvSpPr>
-            <a:spLocks noGrp="1"/>
-          </p:cNvSpPr>
-          <p:nvPr>
-            <p:ph type="hdr" sz="quarter"/>
-          </p:nvPr>
-        </p:nvSpPr>
-        <p:spPr>
-          <a:xfrm>
-            <a:off x="0" y="0"/>
-            <a:ext cx="2971800" cy="458788"/>
-          </a:xfrm>
-          <a:prstGeom prst="rect">
-            <a:avLst/>
-          </a:prstGeom>
-        </p:spPr>
-        <p:txBody>
-          <a:bodyPr vert="horz" lIns="91440" tIns="45720" rIns="91440" bIns="45720" rtlCol="0"/>
-          <a:lstStyle>
-            <a:lvl1pPr algn="l">
-              <a:defRPr sz="1200"/>
-            </a:lvl1pPr>
-          </a:lstStyle>
-          <a:p>
-            <a:endParaRPr lang="en-US"/>
-          </a:p>
-        </p:txBody>
-      </p:sp>
-      <p:sp>
-        <p:nvSpPr>
-          <p:cNvPr id="3" name="Date Placeholder 2"/>
-          <p:cNvSpPr>
-            <a:spLocks noGrp="1"/>
-          </p:cNvSpPr>
-          <p:nvPr>
-            <p:ph type="dt" idx="1"/>
-          </p:nvPr>
-        </p:nvSpPr>
-        <p:spPr>
-          <a:xfrm>
-            <a:off x="3884613" y="0"/>
-            <a:ext cx="2971800" cy="458788"/>
-          </a:xfrm>
-          <a:prstGeom prst="rect">
-            <a:avLst/>
-          </a:prstGeom>
-        </p:spPr>
-        <p:txBody>
-          <a:bodyPr vert="horz" lIns="91440" tIns="45720" rIns="91440" bIns="45720" rtlCol="0"/>
-          <a:lstStyle>
-            <a:lvl1pPr algn="r">
-              <a:defRPr sz="1200"/>
-            </a:lvl1pPr>
-          </a:lstStyle>
-          <a:p>
-            <a:fld id="{5282F153-3F37-0F45-9E97-73ACFA13230C}" type="datetimeFigureOut">
-              <a:rPr lang="en-US"/>
-              <a:t>7/23/19</a:t>
-            </a:fld>
-            <a:endParaRPr lang="en-US"/>
-          </a:p>
-        </p:txBody>
-      </p:sp>
-      <p:sp>
-        <p:nvSpPr>
-          <p:cNvPr id="4" name="Slide Image Placeholder 3"/>
-          <p:cNvSpPr>
-            <a:spLocks noGrp="1" noRot="1" noChangeAspect="1"/>
-          </p:cNvSpPr>
-          <p:nvPr>
-            <p:ph type="sldImg" idx="2"/>
-          </p:nvPr>
-        </p:nvSpPr>
-        <p:spPr>
-          <a:xfrm>
-            <a:off x="685800" y="1143000"/>
-            <a:ext cx="5486400" cy="3086100"/>
-          </a:xfrm>
-          <a:prstGeom prst="rect">
-            <a:avLst/>
-          </a:prstGeom>
-          <a:noFill/>
-          <a:ln w="12700">
-            <a:solidFill>
-              <a:prstClr val="black"/>
-            </a:solidFill>
-          </a:ln>
-        </p:spPr>
-        <p:txBody>
-          <a:bodyPr vert="horz" lIns="91440" tIns="45720" rIns="91440" bIns="45720" rtlCol="0" anchor="ctr"/>
-          <a:lstStyle/>
-          <a:p>
-            <a:endParaRPr lang="en-US"/>
-          </a:p>
-        </p:txBody>
-      </p:sp>
-      <p:sp>
-        <p:nvSpPr>
-          <p:cNvPr id="5" name="Notes Placeholder 4"/>
-          <p:cNvSpPr>
-            <a:spLocks noGrp="1"/>
-          </p:cNvSpPr>
-          <p:nvPr>
-            <p:ph type="body" sz="quarter" idx="3"/>
-          </p:nvPr>
-        </p:nvSpPr>
-        <p:spPr>
-          <a:xfrm>
-            <a:off x="685800" y="4400550"/>
-            <a:ext cx="5486400" cy="3600450"/>
-          </a:xfrm>
-          <a:prstGeom prst="rect">
-            <a:avLst/>
-          </a:prstGeom>
-        </p:spPr>
-        <p:txBody>
-          <a:bodyPr vert="horz" lIns="91440" tIns="45720" rIns="91440" bIns="45720" rtlCol="0"/>
-          <a:lstStyle/>
-          <a:p>
-            <a:pPr lvl="0"/>
-            <a:r>
-              <a:rPr lang="en-US"/>
-              <a:t>Click to edit Master text styles</a:t>
-            </a:r>
-          </a:p>
-          <a:p>
-            <a:pPr lvl="1"/>
-            <a:r>
-              <a:rPr lang="en-US"/>
-              <a:t>Second level</a:t>
-            </a:r>
-          </a:p>
-          <a:p>
-            <a:pPr lvl="2"/>
-            <a:r>
-              <a:rPr lang="en-US"/>
-              <a:t>Third level</a:t>
-            </a:r>
-          </a:p>
-          <a:p>
-            <a:pPr lvl="3"/>
-            <a:r>
-              <a:rPr lang="en-US"/>
-              <a:t>Fourth level</a:t>
-            </a:r>
-          </a:p>
-          <a:p>
-            <a:pPr lvl="4"/>
-            <a:r>
-              <a:rPr lang="en-US"/>
-              <a:t>Fifth level</a:t>
-            </a:r>
-          </a:p>
-        </p:txBody>
-      </p:sp>
-      <p:sp>
-        <p:nvSpPr>
-          <p:cNvPr id="6" name="Footer Placeholder 5"/>
-          <p:cNvSpPr>
-            <a:spLocks noGrp="1"/>
-          </p:cNvSpPr>
-          <p:nvPr>
-            <p:ph type="ftr" sz="quarter" idx="4"/>
-          </p:nvPr>
-        </p:nvSpPr>
-        <p:spPr>
-          <a:xfrm>
-            <a:off x="0" y="8685213"/>
-            <a:ext cx="2971800" cy="458787"/>
-          </a:xfrm>
-          <a:prstGeom prst="rect">
-            <a:avLst/>
-          </a:prstGeom>
-        </p:spPr>
-        <p:txBody>
-          <a:bodyPr vert="horz" lIns="91440" tIns="45720" rIns="91440" bIns="45720" rtlCol="0" anchor="b"/>
-          <a:lstStyle>
-            <a:lvl1pPr algn="l">
-              <a:defRPr sz="1200"/>
-            </a:lvl1pPr>
-          </a:lstStyle>
-          <a:p>
-            <a:endParaRPr lang="en-US"/>
-          </a:p>
-        </p:txBody>
-      </p:sp>
-      <p:sp>
-        <p:nvSpPr>
-          <p:cNvPr id="7" name="Slide Number Placeholder 6"/>
-          <p:cNvSpPr>
-            <a:spLocks noGrp="1"/>
-          </p:cNvSpPr>
-          <p:nvPr>
-            <p:ph type="sldNum" sz="quarter" idx="5"/>
-          </p:nvPr>
-        </p:nvSpPr>
-        <p:spPr>
-          <a:xfrm>
-            <a:off x="3884613" y="8685213"/>
-            <a:ext cx="2971800" cy="458787"/>
-          </a:xfrm>
-          <a:prstGeom prst="rect">
-            <a:avLst/>
-          </a:prstGeom>
-        </p:spPr>
-        <p:txBody>
-          <a:bodyPr vert="horz" lIns="91440" tIns="45720" rIns="91440" bIns="45720" rtlCol="0" anchor="b"/>
-          <a:lstStyle>
-            <a:lvl1pPr algn="r">
-              <a:defRPr sz="1200"/>
-            </a:lvl1pPr>
-          </a:lstStyle>
-          <a:p>
-            <a:fld id="{CE5E9CC1-C706-0F49-92D6-E571CC5EEA8F}" type="slidenum">
-              <a:rPr lang="en-US"/>
-              <a:t>‹#›</a:t>
-            </a:fld>
-            <a:endParaRPr lang="en-US"/>
-          </a:p>
-        </p:txBody>
-      </p:sp>
     </p:spTree>
     <p:extLst>
       <p:ext uri="{BB962C8B-B14F-4D97-AF65-F5344CB8AC3E}">
-        <p14:creationId xmlns:p14="http://schemas.microsoft.com/office/powerpoint/2010/main" val="1024086991"/>
+        <p14:creationId xmlns:p14="http://schemas.microsoft.com/office/powerpoint/2010/main" val="1665174738"/>
       </p:ext>
     </p:extLst>
   </p:cSld>
@@ -509,10 +290,6 @@
           <a:bodyPr/>
           <a:lstStyle/>
           <a:p>
-            <a:r>
-              <a:rPr lang="en-US" dirty="0"/>
-              <a:t/>
-            </a:r>
             <a:endParaRPr lang="en-US" dirty="0"/>
           </a:p>
         </p:txBody>
@@ -597,10 +374,6 @@
           <a:bodyPr/>
           <a:lstStyle/>
           <a:p>
-            <a:r>
-              <a:rPr lang="en-US" dirty="0"/>
-              <a:t/>
-            </a:r>
             <a:endParaRPr lang="en-US" dirty="0"/>
           </a:p>
         </p:txBody>
@@ -685,10 +458,6 @@
           <a:bodyPr/>
           <a:lstStyle/>
           <a:p>
-            <a:r>
-              <a:rPr lang="en-US" dirty="0"/>
-              <a:t/>
-            </a:r>
             <a:endParaRPr lang="en-US" dirty="0"/>
           </a:p>
         </p:txBody>
@@ -773,10 +542,6 @@
           <a:bodyPr/>
           <a:lstStyle/>
           <a:p>
-            <a:r>
-              <a:rPr lang="en-US" dirty="0"/>
-              <a:t/>
-            </a:r>
             <a:endParaRPr lang="en-US" dirty="0"/>
           </a:p>
         </p:txBody>
@@ -861,10 +626,6 @@
           <a:bodyPr/>
           <a:lstStyle/>
           <a:p>
-            <a:r>
-              <a:rPr lang="en-US" dirty="0"/>
-              <a:t/>
-            </a:r>
             <a:endParaRPr lang="en-US" dirty="0"/>
           </a:p>
         </p:txBody>
@@ -949,10 +710,6 @@
           <a:bodyPr/>
           <a:lstStyle/>
           <a:p>
-            <a:r>
-              <a:rPr lang="en-US" dirty="0"/>
-              <a:t/>
-            </a:r>
             <a:endParaRPr lang="en-US" dirty="0"/>
           </a:p>
         </p:txBody>
@@ -1037,10 +794,6 @@
           <a:bodyPr/>
           <a:lstStyle/>
           <a:p>
-            <a:r>
-              <a:rPr lang="en-US" dirty="0"/>
-              <a:t/>
-            </a:r>
             <a:endParaRPr lang="en-US" dirty="0"/>
           </a:p>
         </p:txBody>
@@ -1125,10 +878,6 @@
           <a:bodyPr/>
           <a:lstStyle/>
           <a:p>
-            <a:r>
-              <a:rPr lang="en-US" dirty="0"/>
-              <a:t/>
-            </a:r>
             <a:endParaRPr lang="en-US" dirty="0"/>
           </a:p>
         </p:txBody>
@@ -1213,10 +962,6 @@
           <a:bodyPr/>
           <a:lstStyle/>
           <a:p>
-            <a:r>
-              <a:rPr lang="en-US" dirty="0"/>
-              <a:t/>
-            </a:r>
             <a:endParaRPr lang="en-US" dirty="0"/>
           </a:p>
         </p:txBody>
@@ -1301,10 +1046,6 @@
           <a:bodyPr/>
           <a:lstStyle/>
           <a:p>
-            <a:r>
-              <a:rPr lang="en-US" dirty="0"/>
-              <a:t/>
-            </a:r>
             <a:endParaRPr lang="en-US" dirty="0"/>
           </a:p>
         </p:txBody>
@@ -1378,6 +1119,11 @@
 <file path=ppt/slideMasters/slideMaster1.xml><?xml version="1.0" encoding="utf-8"?>
 <p:sldMaster xmlns:a="http://schemas.openxmlformats.org/drawingml/2006/main" xmlns:r="http://schemas.openxmlformats.org/officeDocument/2006/relationships" xmlns:p="http://schemas.openxmlformats.org/presentationml/2006/main">
   <p:cSld>
+    <p:bg>
+      <p:bgRef idx="1001">
+        <a:schemeClr val="bg1"/>
+      </p:bgRef>
+    </p:bg>
     <p:spTree>
       <p:nvGrpSpPr>
         <p:cNvPr id="1" name=""/>
@@ -1660,6 +1406,7 @@
         <a:solidFill>
           <a:srgbClr val="2B2D42"/>
         </a:solidFill>
+        <a:effectLst/>
       </p:bgPr>
     </p:bg>
     <p:spTree>
@@ -1717,7 +1464,7 @@
           <a:bodyPr wrap="square" lIns="0" tIns="0" rIns="0" bIns="0" rtlCol="0" anchor="ctr"/>
           <a:lstStyle/>
           <a:p>
-            <a:pPr indent="0" marL="0">
+            <a:pPr marL="0" indent="0">
               <a:buNone/>
             </a:pPr>
             <a:r>
@@ -1756,7 +1503,7 @@
           <a:bodyPr wrap="square" lIns="0" tIns="0" rIns="0" bIns="0" rtlCol="0" anchor="ctr"/>
           <a:lstStyle/>
           <a:p>
-            <a:pPr indent="0" marL="0">
+            <a:pPr marL="0" indent="0">
               <a:buNone/>
             </a:pPr>
             <a:r>
@@ -1818,7 +1565,7 @@
           <a:bodyPr wrap="square" lIns="0" tIns="0" rIns="0" bIns="0" rtlCol="0" anchor="ctr"/>
           <a:lstStyle/>
           <a:p>
-            <a:pPr indent="0" marL="0">
+            <a:pPr marL="0" indent="0">
               <a:buNone/>
             </a:pPr>
             <a:r>
@@ -1857,7 +1604,7 @@
           <a:bodyPr wrap="square" lIns="0" tIns="0" rIns="0" bIns="0" rtlCol="0" anchor="ctr"/>
           <a:lstStyle/>
           <a:p>
-            <a:pPr indent="0" marL="0">
+            <a:pPr marL="0" indent="0">
               <a:buNone/>
             </a:pPr>
             <a:r>
@@ -1891,6 +1638,7 @@
         <a:solidFill>
           <a:srgbClr val="2B2D42"/>
         </a:solidFill>
+        <a:effectLst/>
       </p:bgPr>
     </p:bg>
     <p:spTree>
@@ -1948,7 +1696,7 @@
           <a:bodyPr wrap="square" lIns="0" tIns="0" rIns="0" bIns="0" rtlCol="0" anchor="ctr"/>
           <a:lstStyle/>
           <a:p>
-            <a:pPr algn="ctr" indent="0" marL="0">
+            <a:pPr marL="0" indent="0" algn="ctr">
               <a:buNone/>
             </a:pPr>
             <a:r>
@@ -2010,7 +1758,7 @@
           <a:bodyPr wrap="square" lIns="0" tIns="0" rIns="0" bIns="0" rtlCol="0" anchor="ctr"/>
           <a:lstStyle/>
           <a:p>
-            <a:pPr algn="ctr" indent="0" marL="0">
+            <a:pPr marL="0" indent="0" algn="ctr">
               <a:buNone/>
             </a:pPr>
             <a:r>
@@ -2044,6 +1792,7 @@
         <a:solidFill>
           <a:srgbClr val="EDF2F4"/>
         </a:solidFill>
+        <a:effectLst/>
       </p:bgPr>
     </p:bg>
     <p:spTree>
@@ -2081,7 +1830,7 @@
           <a:bodyPr wrap="square" lIns="0" tIns="0" rIns="0" bIns="0" rtlCol="0" anchor="ctr"/>
           <a:lstStyle/>
           <a:p>
-            <a:pPr indent="0" marL="0">
+            <a:pPr marL="0" indent="0">
               <a:buNone/>
             </a:pPr>
             <a:r>
@@ -2138,7 +1887,7 @@
           </a:solidFill>
           <a:ln/>
           <a:effectLst>
-            <a:outerShdw sx="100000" sy="100000" kx="0" ky="0" algn="bl" rotWithShape="0" blurRad="76200" dist="25400" dir="8100000">
+            <a:outerShdw blurRad="76200" dist="25400" dir="8100000" algn="bl" rotWithShape="0">
               <a:srgbClr val="000000">
                 <a:alpha val="10000"/>
               </a:srgbClr>
@@ -2167,7 +1916,7 @@
           <a:bodyPr wrap="square" lIns="0" tIns="0" rIns="0" bIns="0" rtlCol="0" anchor="ctr"/>
           <a:lstStyle/>
           <a:p>
-            <a:pPr algn="ctr" indent="0" marL="0">
+            <a:pPr marL="0" indent="0" algn="ctr">
               <a:buNone/>
             </a:pPr>
             <a:r>
@@ -2206,7 +1955,7 @@
           <a:bodyPr wrap="square" lIns="0" tIns="0" rIns="0" bIns="0" rtlCol="0" anchor="ctr"/>
           <a:lstStyle/>
           <a:p>
-            <a:pPr indent="0" marL="0">
+            <a:pPr marL="0" indent="0">
               <a:buNone/>
             </a:pPr>
             <a:r>
@@ -2243,7 +1992,7 @@
           </a:solidFill>
           <a:ln/>
           <a:effectLst>
-            <a:outerShdw sx="100000" sy="100000" kx="0" ky="0" algn="bl" rotWithShape="0" blurRad="76200" dist="25400" dir="8100000">
+            <a:outerShdw blurRad="76200" dist="25400" dir="8100000" algn="bl" rotWithShape="0">
               <a:srgbClr val="000000">
                 <a:alpha val="10000"/>
               </a:srgbClr>
@@ -2272,7 +2021,7 @@
           <a:bodyPr wrap="square" lIns="0" tIns="0" rIns="0" bIns="0" rtlCol="0" anchor="ctr"/>
           <a:lstStyle/>
           <a:p>
-            <a:pPr algn="ctr" indent="0" marL="0">
+            <a:pPr marL="0" indent="0" algn="ctr">
               <a:buNone/>
             </a:pPr>
             <a:r>
@@ -2311,7 +2060,7 @@
           <a:bodyPr wrap="square" lIns="0" tIns="0" rIns="0" bIns="0" rtlCol="0" anchor="ctr"/>
           <a:lstStyle/>
           <a:p>
-            <a:pPr indent="0" marL="0">
+            <a:pPr marL="0" indent="0">
               <a:buNone/>
             </a:pPr>
             <a:r>
@@ -2348,7 +2097,7 @@
           </a:solidFill>
           <a:ln/>
           <a:effectLst>
-            <a:outerShdw sx="100000" sy="100000" kx="0" ky="0" algn="bl" rotWithShape="0" blurRad="76200" dist="25400" dir="8100000">
+            <a:outerShdw blurRad="76200" dist="25400" dir="8100000" algn="bl" rotWithShape="0">
               <a:srgbClr val="000000">
                 <a:alpha val="10000"/>
               </a:srgbClr>
@@ -2377,7 +2126,7 @@
           <a:bodyPr wrap="square" lIns="0" tIns="0" rIns="0" bIns="0" rtlCol="0" anchor="ctr"/>
           <a:lstStyle/>
           <a:p>
-            <a:pPr algn="ctr" indent="0" marL="0">
+            <a:pPr marL="0" indent="0" algn="ctr">
               <a:buNone/>
             </a:pPr>
             <a:r>
@@ -2416,7 +2165,7 @@
           <a:bodyPr wrap="square" lIns="0" tIns="0" rIns="0" bIns="0" rtlCol="0" anchor="ctr"/>
           <a:lstStyle/>
           <a:p>
-            <a:pPr indent="0" marL="0">
+            <a:pPr marL="0" indent="0">
               <a:buNone/>
             </a:pPr>
             <a:r>
@@ -2453,7 +2202,7 @@
           </a:solidFill>
           <a:ln/>
           <a:effectLst>
-            <a:outerShdw sx="100000" sy="100000" kx="0" ky="0" algn="bl" rotWithShape="0" blurRad="76200" dist="25400" dir="8100000">
+            <a:outerShdw blurRad="76200" dist="25400" dir="8100000" algn="bl" rotWithShape="0">
               <a:srgbClr val="000000">
                 <a:alpha val="10000"/>
               </a:srgbClr>
@@ -2482,7 +2231,7 @@
           <a:bodyPr wrap="square" lIns="0" tIns="0" rIns="0" bIns="0" rtlCol="0" anchor="ctr"/>
           <a:lstStyle/>
           <a:p>
-            <a:pPr algn="ctr" indent="0" marL="0">
+            <a:pPr marL="0" indent="0" algn="ctr">
               <a:buNone/>
             </a:pPr>
             <a:r>
@@ -2521,7 +2270,7 @@
           <a:bodyPr wrap="square" lIns="0" tIns="0" rIns="0" bIns="0" rtlCol="0" anchor="ctr"/>
           <a:lstStyle/>
           <a:p>
-            <a:pPr indent="0" marL="0">
+            <a:pPr marL="0" indent="0">
               <a:buNone/>
             </a:pPr>
             <a:r>
@@ -2558,7 +2307,7 @@
           </a:solidFill>
           <a:ln/>
           <a:effectLst>
-            <a:outerShdw sx="100000" sy="100000" kx="0" ky="0" algn="bl" rotWithShape="0" blurRad="76200" dist="25400" dir="8100000">
+            <a:outerShdw blurRad="76200" dist="25400" dir="8100000" algn="bl" rotWithShape="0">
               <a:srgbClr val="000000">
                 <a:alpha val="10000"/>
               </a:srgbClr>
@@ -2587,7 +2336,7 @@
           <a:bodyPr wrap="square" lIns="0" tIns="0" rIns="0" bIns="0" rtlCol="0" anchor="ctr"/>
           <a:lstStyle/>
           <a:p>
-            <a:pPr algn="ctr" indent="0" marL="0">
+            <a:pPr marL="0" indent="0" algn="ctr">
               <a:buNone/>
             </a:pPr>
             <a:r>
@@ -2626,7 +2375,7 @@
           <a:bodyPr wrap="square" lIns="0" tIns="0" rIns="0" bIns="0" rtlCol="0" anchor="ctr"/>
           <a:lstStyle/>
           <a:p>
-            <a:pPr indent="0" marL="0">
+            <a:pPr marL="0" indent="0">
               <a:buNone/>
             </a:pPr>
             <a:r>
@@ -2663,7 +2412,7 @@
           </a:solidFill>
           <a:ln/>
           <a:effectLst>
-            <a:outerShdw sx="100000" sy="100000" kx="0" ky="0" algn="bl" rotWithShape="0" blurRad="76200" dist="25400" dir="8100000">
+            <a:outerShdw blurRad="76200" dist="25400" dir="8100000" algn="bl" rotWithShape="0">
               <a:srgbClr val="000000">
                 <a:alpha val="10000"/>
               </a:srgbClr>
@@ -2692,7 +2441,7 @@
           <a:bodyPr wrap="square" lIns="0" tIns="0" rIns="0" bIns="0" rtlCol="0" anchor="ctr"/>
           <a:lstStyle/>
           <a:p>
-            <a:pPr algn="ctr" indent="0" marL="0">
+            <a:pPr marL="0" indent="0" algn="ctr">
               <a:buNone/>
             </a:pPr>
             <a:r>
@@ -2731,7 +2480,7 @@
           <a:bodyPr wrap="square" lIns="0" tIns="0" rIns="0" bIns="0" rtlCol="0" anchor="ctr"/>
           <a:lstStyle/>
           <a:p>
-            <a:pPr indent="0" marL="0">
+            <a:pPr marL="0" indent="0">
               <a:buNone/>
             </a:pPr>
             <a:r>
@@ -2765,6 +2514,7 @@
         <a:solidFill>
           <a:srgbClr val="EDF2F4"/>
         </a:solidFill>
+        <a:effectLst/>
       </p:bgPr>
     </p:bg>
     <p:spTree>
@@ -2802,7 +2552,7 @@
           <a:bodyPr wrap="square" lIns="0" tIns="0" rIns="0" bIns="0" rtlCol="0" anchor="ctr"/>
           <a:lstStyle/>
           <a:p>
-            <a:pPr indent="0" marL="0">
+            <a:pPr marL="0" indent="0">
               <a:buNone/>
             </a:pPr>
             <a:r>
@@ -2859,7 +2609,7 @@
           </a:solidFill>
           <a:ln/>
           <a:effectLst>
-            <a:outerShdw sx="100000" sy="100000" kx="0" ky="0" algn="bl" rotWithShape="0" blurRad="76200" dist="25400" dir="8100000">
+            <a:outerShdw blurRad="76200" dist="25400" dir="8100000" algn="bl" rotWithShape="0">
               <a:srgbClr val="000000">
                 <a:alpha val="10000"/>
               </a:srgbClr>
@@ -2888,7 +2638,7 @@
           <a:bodyPr wrap="square" lIns="0" tIns="0" rIns="0" bIns="0" rtlCol="0" anchor="ctr"/>
           <a:lstStyle/>
           <a:p>
-            <a:pPr indent="0" marL="0">
+            <a:pPr marL="0" indent="0">
               <a:buNone/>
             </a:pPr>
             <a:r>
@@ -3010,7 +2760,7 @@
           </a:solidFill>
           <a:ln/>
           <a:effectLst>
-            <a:outerShdw sx="100000" sy="100000" kx="0" ky="0" algn="bl" rotWithShape="0" blurRad="76200" dist="25400" dir="8100000">
+            <a:outerShdw blurRad="76200" dist="25400" dir="8100000" algn="bl" rotWithShape="0">
               <a:srgbClr val="000000">
                 <a:alpha val="10000"/>
               </a:srgbClr>
@@ -3039,7 +2789,7 @@
           <a:bodyPr wrap="square" lIns="0" tIns="0" rIns="0" bIns="0" rtlCol="0" anchor="ctr"/>
           <a:lstStyle/>
           <a:p>
-            <a:pPr indent="0" marL="0">
+            <a:pPr marL="0" indent="0">
               <a:buNone/>
             </a:pPr>
             <a:r>
@@ -3162,7 +2912,7 @@
             <a:endParaRPr lang="en-US" sz="1300" dirty="0"/>
           </a:p>
           <a:p>
-            <a:pPr indent="0" marL="0">
+            <a:pPr marL="0" indent="0">
               <a:lnSpc>
                 <a:spcPct val="160000"/>
               </a:lnSpc>
@@ -3199,6 +2949,7 @@
         <a:solidFill>
           <a:srgbClr val="EDF2F4"/>
         </a:solidFill>
+        <a:effectLst/>
       </p:bgPr>
     </p:bg>
     <p:spTree>
@@ -3236,7 +2987,7 @@
           <a:bodyPr wrap="square" lIns="0" tIns="0" rIns="0" bIns="0" rtlCol="0" anchor="ctr"/>
           <a:lstStyle/>
           <a:p>
-            <a:pPr indent="0" marL="0">
+            <a:pPr marL="0" indent="0">
               <a:buNone/>
             </a:pPr>
             <a:r>
@@ -3295,7 +3046,7 @@
           <a:bodyPr wrap="square" lIns="0" tIns="0" rIns="0" bIns="0" rtlCol="0" anchor="ctr"/>
           <a:lstStyle/>
           <a:p>
-            <a:pPr indent="0" marL="0">
+            <a:pPr marL="0" indent="0">
               <a:buNone/>
             </a:pPr>
             <a:r>
@@ -3332,7 +3083,7 @@
           </a:solidFill>
           <a:ln/>
           <a:effectLst>
-            <a:outerShdw sx="100000" sy="100000" kx="0" ky="0" algn="bl" rotWithShape="0" blurRad="76200" dist="25400" dir="8100000">
+            <a:outerShdw blurRad="76200" dist="25400" dir="8100000" algn="bl" rotWithShape="0">
               <a:srgbClr val="000000">
                 <a:alpha val="10000"/>
               </a:srgbClr>
@@ -3361,7 +3112,7 @@
           <a:bodyPr wrap="square" lIns="0" tIns="0" rIns="0" bIns="0" rtlCol="0" anchor="ctr"/>
           <a:lstStyle/>
           <a:p>
-            <a:pPr indent="0" marL="0">
+            <a:pPr marL="0" indent="0">
               <a:buNone/>
             </a:pPr>
             <a:r>
@@ -3400,7 +3151,7 @@
           <a:bodyPr wrap="square" lIns="0" tIns="0" rIns="0" bIns="0" rtlCol="0" anchor="ctr"/>
           <a:lstStyle/>
           <a:p>
-            <a:pPr indent="0" marL="0">
+            <a:pPr marL="0" indent="0">
               <a:buNone/>
             </a:pPr>
             <a:r>
@@ -3439,7 +3190,7 @@
           <a:bodyPr wrap="square" lIns="0" tIns="0" rIns="0" bIns="0" rtlCol="0" anchor="ctr"/>
           <a:lstStyle/>
           <a:p>
-            <a:pPr indent="0" marL="0">
+            <a:pPr marL="0" indent="0">
               <a:lnSpc>
                 <a:spcPct val="180000"/>
               </a:lnSpc>
@@ -3459,7 +3210,7 @@
             <a:endParaRPr lang="en-US" sz="1200" dirty="0"/>
           </a:p>
           <a:p>
-            <a:pPr indent="0" marL="0">
+            <a:pPr marL="0" indent="0">
               <a:lnSpc>
                 <a:spcPct val="180000"/>
               </a:lnSpc>
@@ -3479,7 +3230,7 @@
             <a:endParaRPr lang="en-US" sz="1200" dirty="0"/>
           </a:p>
           <a:p>
-            <a:pPr indent="0" marL="0">
+            <a:pPr marL="0" indent="0">
               <a:lnSpc>
                 <a:spcPct val="180000"/>
               </a:lnSpc>
@@ -3499,7 +3250,7 @@
             <a:endParaRPr lang="en-US" sz="1200" dirty="0"/>
           </a:p>
           <a:p>
-            <a:pPr indent="0" marL="0">
+            <a:pPr marL="0" indent="0">
               <a:lnSpc>
                 <a:spcPct val="180000"/>
               </a:lnSpc>
@@ -3541,7 +3292,7 @@
           <a:bodyPr wrap="square" lIns="0" tIns="0" rIns="0" bIns="0" rtlCol="0" anchor="ctr"/>
           <a:lstStyle/>
           <a:p>
-            <a:pPr algn="ctr" indent="0" marL="0">
+            <a:pPr marL="0" indent="0" algn="ctr">
               <a:buNone/>
             </a:pPr>
             <a:r>
@@ -3575,7 +3326,7 @@
           </a:solidFill>
           <a:ln/>
           <a:effectLst>
-            <a:outerShdw sx="100000" sy="100000" kx="0" ky="0" algn="bl" rotWithShape="0" blurRad="76200" dist="25400" dir="8100000">
+            <a:outerShdw blurRad="76200" dist="25400" dir="8100000" algn="bl" rotWithShape="0">
               <a:srgbClr val="000000">
                 <a:alpha val="10000"/>
               </a:srgbClr>
@@ -3604,7 +3355,7 @@
           <a:bodyPr wrap="square" lIns="0" tIns="0" rIns="0" bIns="0" rtlCol="0" anchor="ctr"/>
           <a:lstStyle/>
           <a:p>
-            <a:pPr indent="0" marL="0">
+            <a:pPr marL="0" indent="0">
               <a:buNone/>
             </a:pPr>
             <a:r>
@@ -3643,7 +3394,7 @@
           <a:bodyPr wrap="square" lIns="0" tIns="0" rIns="0" bIns="0" rtlCol="0" anchor="ctr"/>
           <a:lstStyle/>
           <a:p>
-            <a:pPr indent="0" marL="0">
+            <a:pPr marL="0" indent="0">
               <a:buNone/>
             </a:pPr>
             <a:r>
@@ -3682,7 +3433,7 @@
           <a:bodyPr wrap="square" lIns="0" tIns="0" rIns="0" bIns="0" rtlCol="0" anchor="ctr"/>
           <a:lstStyle/>
           <a:p>
-            <a:pPr indent="0" marL="0">
+            <a:pPr marL="0" indent="0">
               <a:lnSpc>
                 <a:spcPct val="180000"/>
               </a:lnSpc>
@@ -3702,7 +3453,7 @@
             <a:endParaRPr lang="en-US" sz="1200" dirty="0"/>
           </a:p>
           <a:p>
-            <a:pPr indent="0" marL="0">
+            <a:pPr marL="0" indent="0">
               <a:lnSpc>
                 <a:spcPct val="180000"/>
               </a:lnSpc>
@@ -3722,7 +3473,7 @@
             <a:endParaRPr lang="en-US" sz="1200" dirty="0"/>
           </a:p>
           <a:p>
-            <a:pPr indent="0" marL="0">
+            <a:pPr marL="0" indent="0">
               <a:lnSpc>
                 <a:spcPct val="180000"/>
               </a:lnSpc>
@@ -3742,7 +3493,7 @@
             <a:endParaRPr lang="en-US" sz="1200" dirty="0"/>
           </a:p>
           <a:p>
-            <a:pPr indent="0" marL="0">
+            <a:pPr marL="0" indent="0">
               <a:lnSpc>
                 <a:spcPct val="180000"/>
               </a:lnSpc>
@@ -3779,6 +3530,7 @@
         <a:solidFill>
           <a:srgbClr val="EDF2F4"/>
         </a:solidFill>
+        <a:effectLst/>
       </p:bgPr>
     </p:bg>
     <p:spTree>
@@ -3816,7 +3568,7 @@
           <a:bodyPr wrap="square" lIns="0" tIns="0" rIns="0" bIns="0" rtlCol="0" anchor="ctr"/>
           <a:lstStyle/>
           <a:p>
-            <a:pPr indent="0" marL="0">
+            <a:pPr marL="0" indent="0">
               <a:buNone/>
             </a:pPr>
             <a:r>
@@ -3873,13 +3625,20 @@
           </a:solidFill>
           <a:ln/>
           <a:effectLst>
-            <a:outerShdw sx="100000" sy="100000" kx="0" ky="0" algn="bl" rotWithShape="0" blurRad="76200" dist="25400" dir="8100000">
+            <a:outerShdw blurRad="76200" dist="25400" dir="8100000" algn="bl" rotWithShape="0">
               <a:srgbClr val="000000">
                 <a:alpha val="10000"/>
               </a:srgbClr>
             </a:outerShdw>
           </a:effectLst>
         </p:spPr>
+        <p:txBody>
+          <a:bodyPr/>
+          <a:lstStyle/>
+          <a:p>
+            <a:endParaRPr lang="zh-CN" altLang="en-US"/>
+          </a:p>
+        </p:txBody>
       </p:sp>
       <p:sp>
         <p:nvSpPr>
@@ -3902,7 +3661,7 @@
           <a:bodyPr wrap="square" lIns="0" tIns="0" rIns="0" bIns="0" rtlCol="0" anchor="ctr"/>
           <a:lstStyle/>
           <a:p>
-            <a:pPr indent="0" marL="0">
+            <a:pPr marL="0" indent="0">
               <a:buNone/>
             </a:pPr>
             <a:r>
@@ -3961,7 +3720,7 @@
           <a:bodyPr wrap="square" lIns="0" tIns="0" rIns="0" bIns="0" rtlCol="0" anchor="ctr"/>
           <a:lstStyle/>
           <a:p>
-            <a:pPr indent="0" marL="0">
+            <a:pPr marL="0" indent="0">
               <a:buNone/>
             </a:pPr>
             <a:r>
@@ -4000,7 +3759,7 @@
           <a:bodyPr wrap="square" lIns="0" tIns="0" rIns="0" bIns="0" rtlCol="0" anchor="ctr"/>
           <a:lstStyle/>
           <a:p>
-            <a:pPr indent="0" marL="0">
+            <a:pPr marL="0" indent="0">
               <a:buNone/>
             </a:pPr>
             <a:r>
@@ -4039,7 +3798,7 @@
           <a:bodyPr wrap="square" lIns="0" tIns="0" rIns="0" bIns="0" rtlCol="0" anchor="ctr"/>
           <a:lstStyle/>
           <a:p>
-            <a:pPr indent="0" marL="0">
+            <a:pPr marL="0" indent="0">
               <a:buNone/>
             </a:pPr>
             <a:r>
@@ -4098,7 +3857,7 @@
           <a:bodyPr wrap="square" lIns="0" tIns="0" rIns="0" bIns="0" rtlCol="0" anchor="ctr"/>
           <a:lstStyle/>
           <a:p>
-            <a:pPr indent="0" marL="0">
+            <a:pPr marL="0" indent="0">
               <a:buNone/>
             </a:pPr>
             <a:r>
@@ -4137,7 +3896,7 @@
           <a:bodyPr wrap="square" lIns="0" tIns="0" rIns="0" bIns="0" rtlCol="0" anchor="ctr"/>
           <a:lstStyle/>
           <a:p>
-            <a:pPr indent="0" marL="0">
+            <a:pPr marL="0" indent="0">
               <a:buNone/>
             </a:pPr>
             <a:r>
@@ -4176,7 +3935,7 @@
           <a:bodyPr wrap="square" lIns="0" tIns="0" rIns="0" bIns="0" rtlCol="0" anchor="ctr"/>
           <a:lstStyle/>
           <a:p>
-            <a:pPr indent="0" marL="0">
+            <a:pPr marL="0" indent="0">
               <a:buNone/>
             </a:pPr>
             <a:r>
@@ -4235,7 +3994,7 @@
           <a:bodyPr wrap="square" lIns="0" tIns="0" rIns="0" bIns="0" rtlCol="0" anchor="ctr"/>
           <a:lstStyle/>
           <a:p>
-            <a:pPr indent="0" marL="0">
+            <a:pPr marL="0" indent="0">
               <a:buNone/>
             </a:pPr>
             <a:r>
@@ -4274,7 +4033,7 @@
           <a:bodyPr wrap="square" lIns="0" tIns="0" rIns="0" bIns="0" rtlCol="0" anchor="ctr"/>
           <a:lstStyle/>
           <a:p>
-            <a:pPr indent="0" marL="0">
+            <a:pPr marL="0" indent="0">
               <a:buNone/>
             </a:pPr>
             <a:r>
@@ -4313,7 +4072,7 @@
           <a:bodyPr wrap="square" lIns="0" tIns="0" rIns="0" bIns="0" rtlCol="0" anchor="ctr"/>
           <a:lstStyle/>
           <a:p>
-            <a:pPr indent="0" marL="0">
+            <a:pPr marL="0" indent="0">
               <a:buNone/>
             </a:pPr>
             <a:r>
@@ -4350,13 +4109,20 @@
           </a:solidFill>
           <a:ln/>
           <a:effectLst>
-            <a:outerShdw sx="100000" sy="100000" kx="0" ky="0" algn="bl" rotWithShape="0" blurRad="76200" dist="25400" dir="8100000">
+            <a:outerShdw blurRad="76200" dist="25400" dir="8100000" algn="bl" rotWithShape="0">
               <a:srgbClr val="000000">
                 <a:alpha val="10000"/>
               </a:srgbClr>
             </a:outerShdw>
           </a:effectLst>
         </p:spPr>
+        <p:txBody>
+          <a:bodyPr/>
+          <a:lstStyle/>
+          <a:p>
+            <a:endParaRPr lang="zh-CN" altLang="en-US"/>
+          </a:p>
+        </p:txBody>
       </p:sp>
       <p:sp>
         <p:nvSpPr>
@@ -4379,7 +4145,7 @@
           <a:bodyPr wrap="square" lIns="0" tIns="0" rIns="0" bIns="0" rtlCol="0" anchor="ctr"/>
           <a:lstStyle/>
           <a:p>
-            <a:pPr indent="0" marL="0">
+            <a:pPr marL="0" indent="0">
               <a:buNone/>
             </a:pPr>
             <a:r>
@@ -4418,7 +4184,7 @@
           <a:bodyPr wrap="square" lIns="0" tIns="0" rIns="0" bIns="0" rtlCol="0" anchor="ctr"/>
           <a:lstStyle/>
           <a:p>
-            <a:pPr indent="0" marL="0">
+            <a:pPr marL="0" indent="0">
               <a:lnSpc>
                 <a:spcPct val="160000"/>
               </a:lnSpc>
@@ -4438,7 +4204,7 @@
             <a:endParaRPr lang="en-US" sz="1100" dirty="0"/>
           </a:p>
           <a:p>
-            <a:pPr indent="0" marL="0">
+            <a:pPr marL="0" indent="0">
               <a:lnSpc>
                 <a:spcPct val="160000"/>
               </a:lnSpc>
@@ -4447,7 +4213,7 @@
             <a:endParaRPr lang="en-US" sz="1100" dirty="0"/>
           </a:p>
           <a:p>
-            <a:pPr indent="0" marL="0">
+            <a:pPr marL="0" indent="0">
               <a:lnSpc>
                 <a:spcPct val="160000"/>
               </a:lnSpc>
@@ -4467,7 +4233,7 @@
             <a:endParaRPr lang="en-US" sz="1100" dirty="0"/>
           </a:p>
           <a:p>
-            <a:pPr indent="0" marL="0">
+            <a:pPr marL="0" indent="0">
               <a:lnSpc>
                 <a:spcPct val="160000"/>
               </a:lnSpc>
@@ -4487,7 +4253,7 @@
             <a:endParaRPr lang="en-US" sz="1100" dirty="0"/>
           </a:p>
           <a:p>
-            <a:pPr indent="0" marL="0">
+            <a:pPr marL="0" indent="0">
               <a:lnSpc>
                 <a:spcPct val="160000"/>
               </a:lnSpc>
@@ -4507,7 +4273,7 @@
             <a:endParaRPr lang="en-US" sz="1100" dirty="0"/>
           </a:p>
           <a:p>
-            <a:pPr indent="0" marL="0">
+            <a:pPr marL="0" indent="0">
               <a:lnSpc>
                 <a:spcPct val="160000"/>
               </a:lnSpc>
@@ -4527,7 +4293,7 @@
             <a:endParaRPr lang="en-US" sz="1100" dirty="0"/>
           </a:p>
           <a:p>
-            <a:pPr indent="0" marL="0">
+            <a:pPr marL="0" indent="0">
               <a:lnSpc>
                 <a:spcPct val="160000"/>
               </a:lnSpc>
@@ -4536,7 +4302,7 @@
             <a:endParaRPr lang="en-US" sz="1100" dirty="0"/>
           </a:p>
           <a:p>
-            <a:pPr indent="0" marL="0">
+            <a:pPr marL="0" indent="0">
               <a:lnSpc>
                 <a:spcPct val="160000"/>
               </a:lnSpc>
@@ -4573,6 +4339,7 @@
         <a:solidFill>
           <a:srgbClr val="EDF2F4"/>
         </a:solidFill>
+        <a:effectLst/>
       </p:bgPr>
     </p:bg>
     <p:spTree>
@@ -4610,7 +4377,7 @@
           <a:bodyPr wrap="square" lIns="0" tIns="0" rIns="0" bIns="0" rtlCol="0" anchor="ctr"/>
           <a:lstStyle/>
           <a:p>
-            <a:pPr indent="0" marL="0">
+            <a:pPr marL="0" indent="0">
               <a:buNone/>
             </a:pPr>
             <a:r>
@@ -4664,16 +4431,34 @@
         </p:nvGraphicFramePr>
         <p:xfrm>
           <a:off x="457200" y="1097280"/>
-          <a:ext cx="8229600" cy="914400"/>
+          <a:ext cx="8229600" cy="3831336"/>
         </p:xfrm>
         <a:graphic>
           <a:graphicData uri="http://schemas.openxmlformats.org/drawingml/2006/table">
             <a:tbl>
               <a:tblPr/>
               <a:tblGrid>
-                <a:gridCol w="2560320"/>
-                <a:gridCol w="1097280"/>
-                <a:gridCol w="4572000"/>
+                <a:gridCol w="2560320">
+                  <a:extLst>
+                    <a:ext uri="{9D8B030D-6E8A-4147-A177-3AD203B41FA5}">
+                      <a16:colId xmlns:a16="http://schemas.microsoft.com/office/drawing/2014/main" val="20000"/>
+                    </a:ext>
+                  </a:extLst>
+                </a:gridCol>
+                <a:gridCol w="1097280">
+                  <a:extLst>
+                    <a:ext uri="{9D8B030D-6E8A-4147-A177-3AD203B41FA5}">
+                      <a16:colId xmlns:a16="http://schemas.microsoft.com/office/drawing/2014/main" val="20001"/>
+                    </a:ext>
+                  </a:extLst>
+                </a:gridCol>
+                <a:gridCol w="4572000">
+                  <a:extLst>
+                    <a:ext uri="{9D8B030D-6E8A-4147-A177-3AD203B41FA5}">
+                      <a16:colId xmlns:a16="http://schemas.microsoft.com/office/drawing/2014/main" val="20002"/>
+                    </a:ext>
+                  </a:extLst>
+                </a:gridCol>
               </a:tblGrid>
               <a:tr h="320040">
                 <a:tc>
@@ -4681,7 +4466,7 @@
                     <a:bodyPr/>
                     <a:lstStyle/>
                     <a:p>
-                      <a:pPr indent="0" marL="0">
+                      <a:pPr marL="0" indent="0">
                         <a:buNone/>
                       </a:pPr>
                       <a:r>
@@ -4702,7 +4487,7 @@
                       </a:endParaRPr>
                     </a:p>
                   </a:txBody>
-                  <a:tcPr marL="91440" marR="91440" marT="45720" marB="45720">
+                  <a:tcPr>
                     <a:lnL w="6350" cap="flat" cmpd="sng" algn="ctr">
                       <a:solidFill>
                         <a:srgbClr val="DEE2E6"/>
@@ -4749,7 +4534,7 @@
                     <a:bodyPr/>
                     <a:lstStyle/>
                     <a:p>
-                      <a:pPr indent="0" marL="0">
+                      <a:pPr marL="0" indent="0">
                         <a:buNone/>
                       </a:pPr>
                       <a:r>
@@ -4770,7 +4555,7 @@
                       </a:endParaRPr>
                     </a:p>
                   </a:txBody>
-                  <a:tcPr marL="91440" marR="91440" marT="45720" marB="45720">
+                  <a:tcPr>
                     <a:lnL w="6350" cap="flat" cmpd="sng" algn="ctr">
                       <a:solidFill>
                         <a:srgbClr val="DEE2E6"/>
@@ -4817,7 +4602,7 @@
                     <a:bodyPr/>
                     <a:lstStyle/>
                     <a:p>
-                      <a:pPr indent="0" marL="0">
+                      <a:pPr marL="0" indent="0">
                         <a:buNone/>
                       </a:pPr>
                       <a:r>
@@ -4838,7 +4623,7 @@
                       </a:endParaRPr>
                     </a:p>
                   </a:txBody>
-                  <a:tcPr marL="91440" marR="91440" marT="45720" marB="45720">
+                  <a:tcPr>
                     <a:lnL w="6350" cap="flat" cmpd="sng" algn="ctr">
                       <a:solidFill>
                         <a:srgbClr val="DEE2E6"/>
@@ -4880,6 +4665,11 @@
                     </a:solidFill>
                   </a:tcPr>
                 </a:tc>
+                <a:extLst>
+                  <a:ext uri="{0D108BD9-81ED-4DB2-BD59-A6C34878D82A}">
+                    <a16:rowId xmlns:a16="http://schemas.microsoft.com/office/drawing/2014/main" val="10000"/>
+                  </a:ext>
+                </a:extLst>
               </a:tr>
               <a:tr h="292608">
                 <a:tc>
@@ -4887,7 +4677,7 @@
                     <a:bodyPr/>
                     <a:lstStyle/>
                     <a:p>
-                      <a:pPr indent="0" marL="0">
+                      <a:pPr marL="0" indent="0">
                         <a:buNone/>
                       </a:pPr>
                       <a:r>
@@ -4908,7 +4698,7 @@
                       </a:endParaRPr>
                     </a:p>
                   </a:txBody>
-                  <a:tcPr marL="91440" marR="91440" marT="45720" marB="45720">
+                  <a:tcPr>
                     <a:lnL w="6350" cap="flat" cmpd="sng" algn="ctr">
                       <a:solidFill>
                         <a:srgbClr val="DEE2E6"/>
@@ -4952,7 +4742,7 @@
                     <a:bodyPr/>
                     <a:lstStyle/>
                     <a:p>
-                      <a:pPr indent="0" marL="0">
+                      <a:pPr marL="0" indent="0">
                         <a:buNone/>
                       </a:pPr>
                       <a:r>
@@ -4973,7 +4763,7 @@
                       </a:endParaRPr>
                     </a:p>
                   </a:txBody>
-                  <a:tcPr marL="91440" marR="91440" marT="45720" marB="45720">
+                  <a:tcPr>
                     <a:lnL w="6350" cap="flat" cmpd="sng" algn="ctr">
                       <a:solidFill>
                         <a:srgbClr val="DEE2E6"/>
@@ -5017,7 +4807,7 @@
                     <a:bodyPr/>
                     <a:lstStyle/>
                     <a:p>
-                      <a:pPr indent="0" marL="0">
+                      <a:pPr marL="0" indent="0">
                         <a:buNone/>
                       </a:pPr>
                       <a:r>
@@ -5038,7 +4828,7 @@
                       </a:endParaRPr>
                     </a:p>
                   </a:txBody>
-                  <a:tcPr marL="91440" marR="91440" marT="45720" marB="45720">
+                  <a:tcPr>
                     <a:lnL w="6350" cap="flat" cmpd="sng" algn="ctr">
                       <a:solidFill>
                         <a:srgbClr val="DEE2E6"/>
@@ -5077,6 +4867,11 @@
                     </a:lnB>
                   </a:tcPr>
                 </a:tc>
+                <a:extLst>
+                  <a:ext uri="{0D108BD9-81ED-4DB2-BD59-A6C34878D82A}">
+                    <a16:rowId xmlns:a16="http://schemas.microsoft.com/office/drawing/2014/main" val="10001"/>
+                  </a:ext>
+                </a:extLst>
               </a:tr>
               <a:tr h="292608">
                 <a:tc>
@@ -5084,7 +4879,7 @@
                     <a:bodyPr/>
                     <a:lstStyle/>
                     <a:p>
-                      <a:pPr indent="0" marL="0">
+                      <a:pPr marL="0" indent="0">
                         <a:buNone/>
                       </a:pPr>
                       <a:r>
@@ -5105,7 +4900,7 @@
                       </a:endParaRPr>
                     </a:p>
                   </a:txBody>
-                  <a:tcPr marL="91440" marR="91440" marT="45720" marB="45720">
+                  <a:tcPr>
                     <a:lnL w="6350" cap="flat" cmpd="sng" algn="ctr">
                       <a:solidFill>
                         <a:srgbClr val="DEE2E6"/>
@@ -5149,7 +4944,7 @@
                     <a:bodyPr/>
                     <a:lstStyle/>
                     <a:p>
-                      <a:pPr indent="0" marL="0">
+                      <a:pPr marL="0" indent="0">
                         <a:buNone/>
                       </a:pPr>
                       <a:r>
@@ -5170,7 +4965,7 @@
                       </a:endParaRPr>
                     </a:p>
                   </a:txBody>
-                  <a:tcPr marL="91440" marR="91440" marT="45720" marB="45720">
+                  <a:tcPr>
                     <a:lnL w="6350" cap="flat" cmpd="sng" algn="ctr">
                       <a:solidFill>
                         <a:srgbClr val="DEE2E6"/>
@@ -5214,7 +5009,7 @@
                     <a:bodyPr/>
                     <a:lstStyle/>
                     <a:p>
-                      <a:pPr indent="0" marL="0">
+                      <a:pPr marL="0" indent="0">
                         <a:buNone/>
                       </a:pPr>
                       <a:r>
@@ -5235,7 +5030,7 @@
                       </a:endParaRPr>
                     </a:p>
                   </a:txBody>
-                  <a:tcPr marL="91440" marR="91440" marT="45720" marB="45720">
+                  <a:tcPr>
                     <a:lnL w="6350" cap="flat" cmpd="sng" algn="ctr">
                       <a:solidFill>
                         <a:srgbClr val="DEE2E6"/>
@@ -5274,6 +5069,11 @@
                     </a:lnB>
                   </a:tcPr>
                 </a:tc>
+                <a:extLst>
+                  <a:ext uri="{0D108BD9-81ED-4DB2-BD59-A6C34878D82A}">
+                    <a16:rowId xmlns:a16="http://schemas.microsoft.com/office/drawing/2014/main" val="10002"/>
+                  </a:ext>
+                </a:extLst>
               </a:tr>
               <a:tr h="292608">
                 <a:tc>
@@ -5281,7 +5081,7 @@
                     <a:bodyPr/>
                     <a:lstStyle/>
                     <a:p>
-                      <a:pPr indent="0" marL="0">
+                      <a:pPr marL="0" indent="0">
                         <a:buNone/>
                       </a:pPr>
                       <a:r>
@@ -5302,7 +5102,7 @@
                       </a:endParaRPr>
                     </a:p>
                   </a:txBody>
-                  <a:tcPr marL="91440" marR="91440" marT="45720" marB="45720">
+                  <a:tcPr>
                     <a:lnL w="6350" cap="flat" cmpd="sng" algn="ctr">
                       <a:solidFill>
                         <a:srgbClr val="DEE2E6"/>
@@ -5346,7 +5146,7 @@
                     <a:bodyPr/>
                     <a:lstStyle/>
                     <a:p>
-                      <a:pPr indent="0" marL="0">
+                      <a:pPr marL="0" indent="0">
                         <a:buNone/>
                       </a:pPr>
                       <a:r>
@@ -5367,7 +5167,7 @@
                       </a:endParaRPr>
                     </a:p>
                   </a:txBody>
-                  <a:tcPr marL="91440" marR="91440" marT="45720" marB="45720">
+                  <a:tcPr>
                     <a:lnL w="6350" cap="flat" cmpd="sng" algn="ctr">
                       <a:solidFill>
                         <a:srgbClr val="DEE2E6"/>
@@ -5411,7 +5211,7 @@
                     <a:bodyPr/>
                     <a:lstStyle/>
                     <a:p>
-                      <a:pPr indent="0" marL="0">
+                      <a:pPr marL="0" indent="0">
                         <a:buNone/>
                       </a:pPr>
                       <a:r>
@@ -5432,7 +5232,7 @@
                       </a:endParaRPr>
                     </a:p>
                   </a:txBody>
-                  <a:tcPr marL="91440" marR="91440" marT="45720" marB="45720">
+                  <a:tcPr>
                     <a:lnL w="6350" cap="flat" cmpd="sng" algn="ctr">
                       <a:solidFill>
                         <a:srgbClr val="DEE2E6"/>
@@ -5471,6 +5271,11 @@
                     </a:lnB>
                   </a:tcPr>
                 </a:tc>
+                <a:extLst>
+                  <a:ext uri="{0D108BD9-81ED-4DB2-BD59-A6C34878D82A}">
+                    <a16:rowId xmlns:a16="http://schemas.microsoft.com/office/drawing/2014/main" val="10003"/>
+                  </a:ext>
+                </a:extLst>
               </a:tr>
               <a:tr h="292608">
                 <a:tc>
@@ -5478,7 +5283,7 @@
                     <a:bodyPr/>
                     <a:lstStyle/>
                     <a:p>
-                      <a:pPr indent="0" marL="0">
+                      <a:pPr marL="0" indent="0">
                         <a:buNone/>
                       </a:pPr>
                       <a:r>
@@ -5499,7 +5304,7 @@
                       </a:endParaRPr>
                     </a:p>
                   </a:txBody>
-                  <a:tcPr marL="91440" marR="91440" marT="45720" marB="45720">
+                  <a:tcPr>
                     <a:lnL w="6350" cap="flat" cmpd="sng" algn="ctr">
                       <a:solidFill>
                         <a:srgbClr val="DEE2E6"/>
@@ -5543,7 +5348,7 @@
                     <a:bodyPr/>
                     <a:lstStyle/>
                     <a:p>
-                      <a:pPr indent="0" marL="0">
+                      <a:pPr marL="0" indent="0">
                         <a:buNone/>
                       </a:pPr>
                       <a:r>
@@ -5564,7 +5369,7 @@
                       </a:endParaRPr>
                     </a:p>
                   </a:txBody>
-                  <a:tcPr marL="91440" marR="91440" marT="45720" marB="45720">
+                  <a:tcPr>
                     <a:lnL w="6350" cap="flat" cmpd="sng" algn="ctr">
                       <a:solidFill>
                         <a:srgbClr val="DEE2E6"/>
@@ -5608,7 +5413,7 @@
                     <a:bodyPr/>
                     <a:lstStyle/>
                     <a:p>
-                      <a:pPr indent="0" marL="0">
+                      <a:pPr marL="0" indent="0">
                         <a:buNone/>
                       </a:pPr>
                       <a:r>
@@ -5629,7 +5434,7 @@
                       </a:endParaRPr>
                     </a:p>
                   </a:txBody>
-                  <a:tcPr marL="91440" marR="91440" marT="45720" marB="45720">
+                  <a:tcPr>
                     <a:lnL w="6350" cap="flat" cmpd="sng" algn="ctr">
                       <a:solidFill>
                         <a:srgbClr val="DEE2E6"/>
@@ -5668,6 +5473,11 @@
                     </a:lnB>
                   </a:tcPr>
                 </a:tc>
+                <a:extLst>
+                  <a:ext uri="{0D108BD9-81ED-4DB2-BD59-A6C34878D82A}">
+                    <a16:rowId xmlns:a16="http://schemas.microsoft.com/office/drawing/2014/main" val="10004"/>
+                  </a:ext>
+                </a:extLst>
               </a:tr>
               <a:tr h="292608">
                 <a:tc>
@@ -5675,7 +5485,7 @@
                     <a:bodyPr/>
                     <a:lstStyle/>
                     <a:p>
-                      <a:pPr indent="0" marL="0">
+                      <a:pPr marL="0" indent="0">
                         <a:buNone/>
                       </a:pPr>
                       <a:r>
@@ -5696,7 +5506,7 @@
                       </a:endParaRPr>
                     </a:p>
                   </a:txBody>
-                  <a:tcPr marL="91440" marR="91440" marT="45720" marB="45720">
+                  <a:tcPr>
                     <a:lnL w="6350" cap="flat" cmpd="sng" algn="ctr">
                       <a:solidFill>
                         <a:srgbClr val="DEE2E6"/>
@@ -5740,7 +5550,7 @@
                     <a:bodyPr/>
                     <a:lstStyle/>
                     <a:p>
-                      <a:pPr indent="0" marL="0">
+                      <a:pPr marL="0" indent="0">
                         <a:buNone/>
                       </a:pPr>
                       <a:r>
@@ -5761,7 +5571,7 @@
                       </a:endParaRPr>
                     </a:p>
                   </a:txBody>
-                  <a:tcPr marL="91440" marR="91440" marT="45720" marB="45720">
+                  <a:tcPr>
                     <a:lnL w="6350" cap="flat" cmpd="sng" algn="ctr">
                       <a:solidFill>
                         <a:srgbClr val="DEE2E6"/>
@@ -5805,7 +5615,7 @@
                     <a:bodyPr/>
                     <a:lstStyle/>
                     <a:p>
-                      <a:pPr indent="0" marL="0">
+                      <a:pPr marL="0" indent="0">
                         <a:buNone/>
                       </a:pPr>
                       <a:r>
@@ -5826,7 +5636,7 @@
                       </a:endParaRPr>
                     </a:p>
                   </a:txBody>
-                  <a:tcPr marL="91440" marR="91440" marT="45720" marB="45720">
+                  <a:tcPr>
                     <a:lnL w="6350" cap="flat" cmpd="sng" algn="ctr">
                       <a:solidFill>
                         <a:srgbClr val="DEE2E6"/>
@@ -5865,6 +5675,11 @@
                     </a:lnB>
                   </a:tcPr>
                 </a:tc>
+                <a:extLst>
+                  <a:ext uri="{0D108BD9-81ED-4DB2-BD59-A6C34878D82A}">
+                    <a16:rowId xmlns:a16="http://schemas.microsoft.com/office/drawing/2014/main" val="10005"/>
+                  </a:ext>
+                </a:extLst>
               </a:tr>
               <a:tr h="292608">
                 <a:tc>
@@ -5872,7 +5687,7 @@
                     <a:bodyPr/>
                     <a:lstStyle/>
                     <a:p>
-                      <a:pPr indent="0" marL="0">
+                      <a:pPr marL="0" indent="0">
                         <a:buNone/>
                       </a:pPr>
                       <a:r>
@@ -5893,7 +5708,7 @@
                       </a:endParaRPr>
                     </a:p>
                   </a:txBody>
-                  <a:tcPr marL="91440" marR="91440" marT="45720" marB="45720">
+                  <a:tcPr>
                     <a:lnL w="6350" cap="flat" cmpd="sng" algn="ctr">
                       <a:solidFill>
                         <a:srgbClr val="DEE2E6"/>
@@ -5937,7 +5752,7 @@
                     <a:bodyPr/>
                     <a:lstStyle/>
                     <a:p>
-                      <a:pPr indent="0" marL="0">
+                      <a:pPr marL="0" indent="0">
                         <a:buNone/>
                       </a:pPr>
                       <a:r>
@@ -5958,7 +5773,7 @@
                       </a:endParaRPr>
                     </a:p>
                   </a:txBody>
-                  <a:tcPr marL="91440" marR="91440" marT="45720" marB="45720">
+                  <a:tcPr>
                     <a:lnL w="6350" cap="flat" cmpd="sng" algn="ctr">
                       <a:solidFill>
                         <a:srgbClr val="DEE2E6"/>
@@ -6002,7 +5817,7 @@
                     <a:bodyPr/>
                     <a:lstStyle/>
                     <a:p>
-                      <a:pPr indent="0" marL="0">
+                      <a:pPr marL="0" indent="0">
                         <a:buNone/>
                       </a:pPr>
                       <a:r>
@@ -6023,7 +5838,7 @@
                       </a:endParaRPr>
                     </a:p>
                   </a:txBody>
-                  <a:tcPr marL="91440" marR="91440" marT="45720" marB="45720">
+                  <a:tcPr>
                     <a:lnL w="6350" cap="flat" cmpd="sng" algn="ctr">
                       <a:solidFill>
                         <a:srgbClr val="DEE2E6"/>
@@ -6062,6 +5877,11 @@
                     </a:lnB>
                   </a:tcPr>
                 </a:tc>
+                <a:extLst>
+                  <a:ext uri="{0D108BD9-81ED-4DB2-BD59-A6C34878D82A}">
+                    <a16:rowId xmlns:a16="http://schemas.microsoft.com/office/drawing/2014/main" val="10006"/>
+                  </a:ext>
+                </a:extLst>
               </a:tr>
               <a:tr h="292608">
                 <a:tc>
@@ -6069,7 +5889,7 @@
                     <a:bodyPr/>
                     <a:lstStyle/>
                     <a:p>
-                      <a:pPr indent="0" marL="0">
+                      <a:pPr marL="0" indent="0">
                         <a:buNone/>
                       </a:pPr>
                       <a:r>
@@ -6090,7 +5910,7 @@
                       </a:endParaRPr>
                     </a:p>
                   </a:txBody>
-                  <a:tcPr marL="91440" marR="91440" marT="45720" marB="45720">
+                  <a:tcPr>
                     <a:lnL w="6350" cap="flat" cmpd="sng" algn="ctr">
                       <a:solidFill>
                         <a:srgbClr val="DEE2E6"/>
@@ -6134,7 +5954,7 @@
                     <a:bodyPr/>
                     <a:lstStyle/>
                     <a:p>
-                      <a:pPr indent="0" marL="0">
+                      <a:pPr marL="0" indent="0">
                         <a:buNone/>
                       </a:pPr>
                       <a:r>
@@ -6155,7 +5975,7 @@
                       </a:endParaRPr>
                     </a:p>
                   </a:txBody>
-                  <a:tcPr marL="91440" marR="91440" marT="45720" marB="45720">
+                  <a:tcPr>
                     <a:lnL w="6350" cap="flat" cmpd="sng" algn="ctr">
                       <a:solidFill>
                         <a:srgbClr val="DEE2E6"/>
@@ -6199,7 +6019,7 @@
                     <a:bodyPr/>
                     <a:lstStyle/>
                     <a:p>
-                      <a:pPr indent="0" marL="0">
+                      <a:pPr marL="0" indent="0">
                         <a:buNone/>
                       </a:pPr>
                       <a:r>
@@ -6220,7 +6040,7 @@
                       </a:endParaRPr>
                     </a:p>
                   </a:txBody>
-                  <a:tcPr marL="91440" marR="91440" marT="45720" marB="45720">
+                  <a:tcPr>
                     <a:lnL w="6350" cap="flat" cmpd="sng" algn="ctr">
                       <a:solidFill>
                         <a:srgbClr val="DEE2E6"/>
@@ -6259,6 +6079,11 @@
                     </a:lnB>
                   </a:tcPr>
                 </a:tc>
+                <a:extLst>
+                  <a:ext uri="{0D108BD9-81ED-4DB2-BD59-A6C34878D82A}">
+                    <a16:rowId xmlns:a16="http://schemas.microsoft.com/office/drawing/2014/main" val="10007"/>
+                  </a:ext>
+                </a:extLst>
               </a:tr>
               <a:tr h="292608">
                 <a:tc>
@@ -6266,7 +6091,7 @@
                     <a:bodyPr/>
                     <a:lstStyle/>
                     <a:p>
-                      <a:pPr indent="0" marL="0">
+                      <a:pPr marL="0" indent="0">
                         <a:buNone/>
                       </a:pPr>
                       <a:r>
@@ -6287,7 +6112,7 @@
                       </a:endParaRPr>
                     </a:p>
                   </a:txBody>
-                  <a:tcPr marL="91440" marR="91440" marT="45720" marB="45720">
+                  <a:tcPr>
                     <a:lnL w="6350" cap="flat" cmpd="sng" algn="ctr">
                       <a:solidFill>
                         <a:srgbClr val="DEE2E6"/>
@@ -6331,7 +6156,7 @@
                     <a:bodyPr/>
                     <a:lstStyle/>
                     <a:p>
-                      <a:pPr indent="0" marL="0">
+                      <a:pPr marL="0" indent="0">
                         <a:buNone/>
                       </a:pPr>
                       <a:r>
@@ -6352,7 +6177,7 @@
                       </a:endParaRPr>
                     </a:p>
                   </a:txBody>
-                  <a:tcPr marL="91440" marR="91440" marT="45720" marB="45720">
+                  <a:tcPr>
                     <a:lnL w="6350" cap="flat" cmpd="sng" algn="ctr">
                       <a:solidFill>
                         <a:srgbClr val="DEE2E6"/>
@@ -6396,7 +6221,7 @@
                     <a:bodyPr/>
                     <a:lstStyle/>
                     <a:p>
-                      <a:pPr indent="0" marL="0">
+                      <a:pPr marL="0" indent="0">
                         <a:buNone/>
                       </a:pPr>
                       <a:r>
@@ -6417,7 +6242,7 @@
                       </a:endParaRPr>
                     </a:p>
                   </a:txBody>
-                  <a:tcPr marL="91440" marR="91440" marT="45720" marB="45720">
+                  <a:tcPr>
                     <a:lnL w="6350" cap="flat" cmpd="sng" algn="ctr">
                       <a:solidFill>
                         <a:srgbClr val="DEE2E6"/>
@@ -6456,6 +6281,11 @@
                     </a:lnB>
                   </a:tcPr>
                 </a:tc>
+                <a:extLst>
+                  <a:ext uri="{0D108BD9-81ED-4DB2-BD59-A6C34878D82A}">
+                    <a16:rowId xmlns:a16="http://schemas.microsoft.com/office/drawing/2014/main" val="10008"/>
+                  </a:ext>
+                </a:extLst>
               </a:tr>
               <a:tr h="292608">
                 <a:tc>
@@ -6463,7 +6293,7 @@
                     <a:bodyPr/>
                     <a:lstStyle/>
                     <a:p>
-                      <a:pPr indent="0" marL="0">
+                      <a:pPr marL="0" indent="0">
                         <a:buNone/>
                       </a:pPr>
                       <a:r>
@@ -6484,7 +6314,7 @@
                       </a:endParaRPr>
                     </a:p>
                   </a:txBody>
-                  <a:tcPr marL="91440" marR="91440" marT="45720" marB="45720">
+                  <a:tcPr>
                     <a:lnL w="6350" cap="flat" cmpd="sng" algn="ctr">
                       <a:solidFill>
                         <a:srgbClr val="DEE2E6"/>
@@ -6528,7 +6358,7 @@
                     <a:bodyPr/>
                     <a:lstStyle/>
                     <a:p>
-                      <a:pPr indent="0" marL="0">
+                      <a:pPr marL="0" indent="0">
                         <a:buNone/>
                       </a:pPr>
                       <a:r>
@@ -6549,7 +6379,7 @@
                       </a:endParaRPr>
                     </a:p>
                   </a:txBody>
-                  <a:tcPr marL="91440" marR="91440" marT="45720" marB="45720">
+                  <a:tcPr>
                     <a:lnL w="6350" cap="flat" cmpd="sng" algn="ctr">
                       <a:solidFill>
                         <a:srgbClr val="DEE2E6"/>
@@ -6593,7 +6423,7 @@
                     <a:bodyPr/>
                     <a:lstStyle/>
                     <a:p>
-                      <a:pPr indent="0" marL="0">
+                      <a:pPr marL="0" indent="0">
                         <a:buNone/>
                       </a:pPr>
                       <a:r>
@@ -6614,7 +6444,7 @@
                       </a:endParaRPr>
                     </a:p>
                   </a:txBody>
-                  <a:tcPr marL="91440" marR="91440" marT="45720" marB="45720">
+                  <a:tcPr>
                     <a:lnL w="6350" cap="flat" cmpd="sng" algn="ctr">
                       <a:solidFill>
                         <a:srgbClr val="DEE2E6"/>
@@ -6653,6 +6483,11 @@
                     </a:lnB>
                   </a:tcPr>
                 </a:tc>
+                <a:extLst>
+                  <a:ext uri="{0D108BD9-81ED-4DB2-BD59-A6C34878D82A}">
+                    <a16:rowId xmlns:a16="http://schemas.microsoft.com/office/drawing/2014/main" val="10009"/>
+                  </a:ext>
+                </a:extLst>
               </a:tr>
               <a:tr h="292608">
                 <a:tc>
@@ -6660,7 +6495,7 @@
                     <a:bodyPr/>
                     <a:lstStyle/>
                     <a:p>
-                      <a:pPr indent="0" marL="0">
+                      <a:pPr marL="0" indent="0">
                         <a:buNone/>
                       </a:pPr>
                       <a:r>
@@ -6681,7 +6516,7 @@
                       </a:endParaRPr>
                     </a:p>
                   </a:txBody>
-                  <a:tcPr marL="91440" marR="91440" marT="45720" marB="45720">
+                  <a:tcPr>
                     <a:lnL w="6350" cap="flat" cmpd="sng" algn="ctr">
                       <a:solidFill>
                         <a:srgbClr val="DEE2E6"/>
@@ -6725,7 +6560,7 @@
                     <a:bodyPr/>
                     <a:lstStyle/>
                     <a:p>
-                      <a:pPr indent="0" marL="0">
+                      <a:pPr marL="0" indent="0">
                         <a:buNone/>
                       </a:pPr>
                       <a:r>
@@ -6746,7 +6581,7 @@
                       </a:endParaRPr>
                     </a:p>
                   </a:txBody>
-                  <a:tcPr marL="91440" marR="91440" marT="45720" marB="45720">
+                  <a:tcPr>
                     <a:lnL w="6350" cap="flat" cmpd="sng" algn="ctr">
                       <a:solidFill>
                         <a:srgbClr val="DEE2E6"/>
@@ -6790,7 +6625,7 @@
                     <a:bodyPr/>
                     <a:lstStyle/>
                     <a:p>
-                      <a:pPr indent="0" marL="0">
+                      <a:pPr marL="0" indent="0">
                         <a:buNone/>
                       </a:pPr>
                       <a:r>
@@ -6811,7 +6646,7 @@
                       </a:endParaRPr>
                     </a:p>
                   </a:txBody>
-                  <a:tcPr marL="91440" marR="91440" marT="45720" marB="45720">
+                  <a:tcPr>
                     <a:lnL w="6350" cap="flat" cmpd="sng" algn="ctr">
                       <a:solidFill>
                         <a:srgbClr val="DEE2E6"/>
@@ -6850,6 +6685,11 @@
                     </a:lnB>
                   </a:tcPr>
                 </a:tc>
+                <a:extLst>
+                  <a:ext uri="{0D108BD9-81ED-4DB2-BD59-A6C34878D82A}">
+                    <a16:rowId xmlns:a16="http://schemas.microsoft.com/office/drawing/2014/main" val="10010"/>
+                  </a:ext>
+                </a:extLst>
               </a:tr>
               <a:tr h="292608">
                 <a:tc>
@@ -6857,7 +6697,7 @@
                     <a:bodyPr/>
                     <a:lstStyle/>
                     <a:p>
-                      <a:pPr indent="0" marL="0">
+                      <a:pPr marL="0" indent="0">
                         <a:buNone/>
                       </a:pPr>
                       <a:r>
@@ -6878,7 +6718,7 @@
                       </a:endParaRPr>
                     </a:p>
                   </a:txBody>
-                  <a:tcPr marL="91440" marR="91440" marT="45720" marB="45720">
+                  <a:tcPr>
                     <a:lnL w="6350" cap="flat" cmpd="sng" algn="ctr">
                       <a:solidFill>
                         <a:srgbClr val="DEE2E6"/>
@@ -6922,7 +6762,7 @@
                     <a:bodyPr/>
                     <a:lstStyle/>
                     <a:p>
-                      <a:pPr indent="0" marL="0">
+                      <a:pPr marL="0" indent="0">
                         <a:buNone/>
                       </a:pPr>
                       <a:r>
@@ -6943,7 +6783,7 @@
                       </a:endParaRPr>
                     </a:p>
                   </a:txBody>
-                  <a:tcPr marL="91440" marR="91440" marT="45720" marB="45720">
+                  <a:tcPr>
                     <a:lnL w="6350" cap="flat" cmpd="sng" algn="ctr">
                       <a:solidFill>
                         <a:srgbClr val="DEE2E6"/>
@@ -6987,7 +6827,7 @@
                     <a:bodyPr/>
                     <a:lstStyle/>
                     <a:p>
-                      <a:pPr indent="0" marL="0">
+                      <a:pPr marL="0" indent="0">
                         <a:buNone/>
                       </a:pPr>
                       <a:r>
@@ -7008,7 +6848,7 @@
                       </a:endParaRPr>
                     </a:p>
                   </a:txBody>
-                  <a:tcPr marL="91440" marR="91440" marT="45720" marB="45720">
+                  <a:tcPr>
                     <a:lnL w="6350" cap="flat" cmpd="sng" algn="ctr">
                       <a:solidFill>
                         <a:srgbClr val="DEE2E6"/>
@@ -7047,6 +6887,11 @@
                     </a:lnB>
                   </a:tcPr>
                 </a:tc>
+                <a:extLst>
+                  <a:ext uri="{0D108BD9-81ED-4DB2-BD59-A6C34878D82A}">
+                    <a16:rowId xmlns:a16="http://schemas.microsoft.com/office/drawing/2014/main" val="10011"/>
+                  </a:ext>
+                </a:extLst>
               </a:tr>
               <a:tr h="292608">
                 <a:tc>
@@ -7054,7 +6899,7 @@
                     <a:bodyPr/>
                     <a:lstStyle/>
                     <a:p>
-                      <a:pPr indent="0" marL="0">
+                      <a:pPr marL="0" indent="0">
                         <a:buNone/>
                       </a:pPr>
                       <a:r>
@@ -7075,7 +6920,7 @@
                       </a:endParaRPr>
                     </a:p>
                   </a:txBody>
-                  <a:tcPr marL="91440" marR="91440" marT="45720" marB="45720">
+                  <a:tcPr>
                     <a:lnL w="6350" cap="flat" cmpd="sng" algn="ctr">
                       <a:solidFill>
                         <a:srgbClr val="DEE2E6"/>
@@ -7119,7 +6964,7 @@
                     <a:bodyPr/>
                     <a:lstStyle/>
                     <a:p>
-                      <a:pPr indent="0" marL="0">
+                      <a:pPr marL="0" indent="0">
                         <a:buNone/>
                       </a:pPr>
                       <a:r>
@@ -7140,7 +6985,7 @@
                       </a:endParaRPr>
                     </a:p>
                   </a:txBody>
-                  <a:tcPr marL="91440" marR="91440" marT="45720" marB="45720">
+                  <a:tcPr>
                     <a:lnL w="6350" cap="flat" cmpd="sng" algn="ctr">
                       <a:solidFill>
                         <a:srgbClr val="DEE2E6"/>
@@ -7184,7 +7029,7 @@
                     <a:bodyPr/>
                     <a:lstStyle/>
                     <a:p>
-                      <a:pPr indent="0" marL="0">
+                      <a:pPr marL="0" indent="0">
                         <a:buNone/>
                       </a:pPr>
                       <a:r>
@@ -7205,7 +7050,7 @@
                       </a:endParaRPr>
                     </a:p>
                   </a:txBody>
-                  <a:tcPr marL="91440" marR="91440" marT="45720" marB="45720">
+                  <a:tcPr>
                     <a:lnL w="6350" cap="flat" cmpd="sng" algn="ctr">
                       <a:solidFill>
                         <a:srgbClr val="DEE2E6"/>
@@ -7244,6 +7089,11 @@
                     </a:lnB>
                   </a:tcPr>
                 </a:tc>
+                <a:extLst>
+                  <a:ext uri="{0D108BD9-81ED-4DB2-BD59-A6C34878D82A}">
+                    <a16:rowId xmlns:a16="http://schemas.microsoft.com/office/drawing/2014/main" val="10012"/>
+                  </a:ext>
+                </a:extLst>
               </a:tr>
             </a:tbl>
           </a:graphicData>
@@ -7270,7 +7120,7 @@
           <a:bodyPr wrap="square" lIns="0" tIns="0" rIns="0" bIns="0" rtlCol="0" anchor="ctr"/>
           <a:lstStyle/>
           <a:p>
-            <a:pPr indent="0" marL="0">
+            <a:pPr marL="0" indent="0">
               <a:buNone/>
             </a:pPr>
             <a:r>
@@ -7304,6 +7154,7 @@
         <a:solidFill>
           <a:srgbClr val="EDF2F4"/>
         </a:solidFill>
+        <a:effectLst/>
       </p:bgPr>
     </p:bg>
     <p:spTree>
@@ -7341,7 +7192,7 @@
           <a:bodyPr wrap="square" lIns="0" tIns="0" rIns="0" bIns="0" rtlCol="0" anchor="ctr"/>
           <a:lstStyle/>
           <a:p>
-            <a:pPr indent="0" marL="0">
+            <a:pPr marL="0" indent="0">
               <a:buNone/>
             </a:pPr>
             <a:r>
@@ -7398,7 +7249,7 @@
           </a:solidFill>
           <a:ln/>
           <a:effectLst>
-            <a:outerShdw sx="100000" sy="100000" kx="0" ky="0" algn="bl" rotWithShape="0" blurRad="76200" dist="25400" dir="8100000">
+            <a:outerShdw blurRad="76200" dist="25400" dir="8100000" algn="bl" rotWithShape="0">
               <a:srgbClr val="000000">
                 <a:alpha val="10000"/>
               </a:srgbClr>
@@ -7427,7 +7278,7 @@
           <a:bodyPr wrap="square" lIns="0" tIns="0" rIns="0" bIns="0" rtlCol="0" anchor="ctr"/>
           <a:lstStyle/>
           <a:p>
-            <a:pPr indent="0" marL="0">
+            <a:pPr marL="0" indent="0">
               <a:buNone/>
             </a:pPr>
             <a:r>
@@ -7466,7 +7317,7 @@
           <a:bodyPr wrap="square" lIns="0" tIns="0" rIns="0" bIns="0" rtlCol="0" anchor="ctr"/>
           <a:lstStyle/>
           <a:p>
-            <a:pPr indent="0" marL="0">
+            <a:pPr marL="0" indent="0">
               <a:buNone/>
             </a:pPr>
             <a:r>
@@ -7505,7 +7356,7 @@
           <a:bodyPr wrap="square" lIns="0" tIns="0" rIns="0" bIns="0" rtlCol="0" anchor="ctr"/>
           <a:lstStyle/>
           <a:p>
-            <a:pPr indent="0" marL="0">
+            <a:pPr marL="0" indent="0">
               <a:buNone/>
             </a:pPr>
             <a:r>
@@ -7544,7 +7395,7 @@
           <a:bodyPr wrap="square" lIns="0" tIns="0" rIns="0" bIns="0" rtlCol="0" anchor="ctr"/>
           <a:lstStyle/>
           <a:p>
-            <a:pPr indent="0" marL="0">
+            <a:pPr marL="0" indent="0">
               <a:buNone/>
             </a:pPr>
             <a:r>
@@ -7583,7 +7434,7 @@
           <a:bodyPr wrap="square" lIns="0" tIns="0" rIns="0" bIns="0" rtlCol="0" anchor="ctr"/>
           <a:lstStyle/>
           <a:p>
-            <a:pPr indent="0" marL="0">
+            <a:pPr marL="0" indent="0">
               <a:buNone/>
             </a:pPr>
             <a:r>
@@ -7622,7 +7473,7 @@
           <a:bodyPr wrap="square" lIns="0" tIns="0" rIns="0" bIns="0" rtlCol="0" anchor="ctr"/>
           <a:lstStyle/>
           <a:p>
-            <a:pPr indent="0" marL="0">
+            <a:pPr marL="0" indent="0">
               <a:buNone/>
             </a:pPr>
             <a:r>
@@ -7661,7 +7512,7 @@
           <a:bodyPr wrap="square" lIns="0" tIns="0" rIns="0" bIns="0" rtlCol="0" anchor="ctr"/>
           <a:lstStyle/>
           <a:p>
-            <a:pPr indent="0" marL="0">
+            <a:pPr marL="0" indent="0">
               <a:buNone/>
             </a:pPr>
             <a:r>
@@ -7700,7 +7551,7 @@
           <a:bodyPr wrap="square" lIns="0" tIns="0" rIns="0" bIns="0" rtlCol="0" anchor="ctr"/>
           <a:lstStyle/>
           <a:p>
-            <a:pPr indent="0" marL="0">
+            <a:pPr marL="0" indent="0">
               <a:buNone/>
             </a:pPr>
             <a:r>
@@ -7739,7 +7590,7 @@
           <a:bodyPr wrap="square" lIns="0" tIns="0" rIns="0" bIns="0" rtlCol="0" anchor="ctr"/>
           <a:lstStyle/>
           <a:p>
-            <a:pPr indent="0" marL="0">
+            <a:pPr marL="0" indent="0">
               <a:buNone/>
             </a:pPr>
             <a:r>
@@ -7778,7 +7629,7 @@
           <a:bodyPr wrap="square" lIns="0" tIns="0" rIns="0" bIns="0" rtlCol="0" anchor="ctr"/>
           <a:lstStyle/>
           <a:p>
-            <a:pPr indent="0" marL="0">
+            <a:pPr marL="0" indent="0">
               <a:buNone/>
             </a:pPr>
             <a:r>
@@ -7817,7 +7668,7 @@
           <a:bodyPr wrap="square" lIns="0" tIns="0" rIns="0" bIns="0" rtlCol="0" anchor="ctr"/>
           <a:lstStyle/>
           <a:p>
-            <a:pPr indent="0" marL="0">
+            <a:pPr marL="0" indent="0">
               <a:buNone/>
             </a:pPr>
             <a:r>
@@ -7854,7 +7705,7 @@
           </a:solidFill>
           <a:ln/>
           <a:effectLst>
-            <a:outerShdw sx="100000" sy="100000" kx="0" ky="0" algn="bl" rotWithShape="0" blurRad="76200" dist="25400" dir="8100000">
+            <a:outerShdw blurRad="76200" dist="25400" dir="8100000" algn="bl" rotWithShape="0">
               <a:srgbClr val="000000">
                 <a:alpha val="10000"/>
               </a:srgbClr>
@@ -7883,7 +7734,7 @@
           <a:bodyPr wrap="square" lIns="0" tIns="0" rIns="0" bIns="0" rtlCol="0" anchor="ctr"/>
           <a:lstStyle/>
           <a:p>
-            <a:pPr indent="0" marL="0">
+            <a:pPr marL="0" indent="0">
               <a:buNone/>
             </a:pPr>
             <a:r>
@@ -7922,7 +7773,7 @@
           <a:bodyPr wrap="square" lIns="0" tIns="0" rIns="0" bIns="0" rtlCol="0" anchor="ctr"/>
           <a:lstStyle/>
           <a:p>
-            <a:pPr indent="0" marL="0">
+            <a:pPr marL="0" indent="0">
               <a:lnSpc>
                 <a:spcPct val="150000"/>
               </a:lnSpc>
@@ -7942,7 +7793,7 @@
             <a:endParaRPr lang="en-US" sz="1200" dirty="0"/>
           </a:p>
           <a:p>
-            <a:pPr indent="0" marL="0">
+            <a:pPr marL="0" indent="0">
               <a:lnSpc>
                 <a:spcPct val="150000"/>
               </a:lnSpc>
@@ -7951,7 +7802,7 @@
             <a:endParaRPr lang="en-US" sz="1200" dirty="0"/>
           </a:p>
           <a:p>
-            <a:pPr indent="0" marL="0">
+            <a:pPr marL="0" indent="0">
               <a:lnSpc>
                 <a:spcPct val="150000"/>
               </a:lnSpc>
@@ -7971,7 +7822,7 @@
             <a:endParaRPr lang="en-US" sz="1200" dirty="0"/>
           </a:p>
           <a:p>
-            <a:pPr indent="0" marL="0">
+            <a:pPr marL="0" indent="0">
               <a:lnSpc>
                 <a:spcPct val="150000"/>
               </a:lnSpc>
@@ -7991,7 +7842,7 @@
             <a:endParaRPr lang="en-US" sz="1200" dirty="0"/>
           </a:p>
           <a:p>
-            <a:pPr indent="0" marL="0">
+            <a:pPr marL="0" indent="0">
               <a:lnSpc>
                 <a:spcPct val="150000"/>
               </a:lnSpc>
@@ -8000,7 +7851,7 @@
             <a:endParaRPr lang="en-US" sz="1200" dirty="0"/>
           </a:p>
           <a:p>
-            <a:pPr indent="0" marL="0">
+            <a:pPr marL="0" indent="0">
               <a:lnSpc>
                 <a:spcPct val="150000"/>
               </a:lnSpc>
@@ -8020,7 +7871,7 @@
             <a:endParaRPr lang="en-US" sz="1200" dirty="0"/>
           </a:p>
           <a:p>
-            <a:pPr indent="0" marL="0">
+            <a:pPr marL="0" indent="0">
               <a:lnSpc>
                 <a:spcPct val="150000"/>
               </a:lnSpc>
@@ -8057,6 +7908,7 @@
         <a:solidFill>
           <a:srgbClr val="EDF2F4"/>
         </a:solidFill>
+        <a:effectLst/>
       </p:bgPr>
     </p:bg>
     <p:spTree>
@@ -8094,7 +7946,7 @@
           <a:bodyPr wrap="square" lIns="0" tIns="0" rIns="0" bIns="0" rtlCol="0" anchor="ctr"/>
           <a:lstStyle/>
           <a:p>
-            <a:pPr indent="0" marL="0">
+            <a:pPr marL="0" indent="0">
               <a:buNone/>
             </a:pPr>
             <a:r>
@@ -8151,7 +8003,7 @@
           </a:solidFill>
           <a:ln/>
           <a:effectLst>
-            <a:outerShdw sx="100000" sy="100000" kx="0" ky="0" algn="bl" rotWithShape="0" blurRad="76200" dist="25400" dir="8100000">
+            <a:outerShdw blurRad="76200" dist="25400" dir="8100000" algn="bl" rotWithShape="0">
               <a:srgbClr val="000000">
                 <a:alpha val="10000"/>
               </a:srgbClr>
@@ -8180,7 +8032,7 @@
           <a:bodyPr wrap="square" lIns="0" tIns="0" rIns="0" bIns="0" rtlCol="0" anchor="ctr"/>
           <a:lstStyle/>
           <a:p>
-            <a:pPr indent="0" marL="0">
+            <a:pPr marL="0" indent="0">
               <a:buNone/>
             </a:pPr>
             <a:r>
@@ -8219,7 +8071,7 @@
           <a:bodyPr wrap="square" lIns="0" tIns="0" rIns="0" bIns="0" rtlCol="0" anchor="ctr"/>
           <a:lstStyle/>
           <a:p>
-            <a:pPr indent="0" marL="0">
+            <a:pPr marL="0" indent="0">
               <a:buNone/>
             </a:pPr>
             <a:r>
@@ -8258,7 +8110,7 @@
           <a:bodyPr wrap="square" lIns="0" tIns="0" rIns="0" bIns="0" rtlCol="0" anchor="ctr"/>
           <a:lstStyle/>
           <a:p>
-            <a:pPr indent="0" marL="0">
+            <a:pPr marL="0" indent="0">
               <a:buNone/>
             </a:pPr>
             <a:r>
@@ -8297,7 +8149,7 @@
           <a:bodyPr wrap="square" lIns="0" tIns="0" rIns="0" bIns="0" rtlCol="0" anchor="ctr"/>
           <a:lstStyle/>
           <a:p>
-            <a:pPr indent="0" marL="0">
+            <a:pPr marL="0" indent="0">
               <a:buNone/>
             </a:pPr>
             <a:r>
@@ -8336,7 +8188,7 @@
           <a:bodyPr wrap="square" lIns="0" tIns="0" rIns="0" bIns="0" rtlCol="0" anchor="ctr"/>
           <a:lstStyle/>
           <a:p>
-            <a:pPr indent="0" marL="0">
+            <a:pPr marL="0" indent="0">
               <a:buNone/>
             </a:pPr>
             <a:r>
@@ -8375,7 +8227,7 @@
           <a:bodyPr wrap="square" lIns="0" tIns="0" rIns="0" bIns="0" rtlCol="0" anchor="ctr"/>
           <a:lstStyle/>
           <a:p>
-            <a:pPr indent="0" marL="0">
+            <a:pPr marL="0" indent="0">
               <a:buNone/>
             </a:pPr>
             <a:r>
@@ -8414,7 +8266,7 @@
           <a:bodyPr wrap="square" lIns="0" tIns="0" rIns="0" bIns="0" rtlCol="0" anchor="ctr"/>
           <a:lstStyle/>
           <a:p>
-            <a:pPr indent="0" marL="0">
+            <a:pPr marL="0" indent="0">
               <a:buNone/>
             </a:pPr>
             <a:r>
@@ -8453,7 +8305,7 @@
           <a:bodyPr wrap="square" lIns="0" tIns="0" rIns="0" bIns="0" rtlCol="0" anchor="ctr"/>
           <a:lstStyle/>
           <a:p>
-            <a:pPr indent="0" marL="0">
+            <a:pPr marL="0" indent="0">
               <a:buNone/>
             </a:pPr>
             <a:r>
@@ -8492,7 +8344,7 @@
           <a:bodyPr wrap="square" lIns="0" tIns="0" rIns="0" bIns="0" rtlCol="0" anchor="ctr"/>
           <a:lstStyle/>
           <a:p>
-            <a:pPr indent="0" marL="0">
+            <a:pPr marL="0" indent="0">
               <a:buNone/>
             </a:pPr>
             <a:r>
@@ -8529,7 +8381,7 @@
           </a:solidFill>
           <a:ln/>
           <a:effectLst>
-            <a:outerShdw sx="100000" sy="100000" kx="0" ky="0" algn="bl" rotWithShape="0" blurRad="76200" dist="25400" dir="8100000">
+            <a:outerShdw blurRad="76200" dist="25400" dir="8100000" algn="bl" rotWithShape="0">
               <a:srgbClr val="000000">
                 <a:alpha val="10000"/>
               </a:srgbClr>
@@ -8558,7 +8410,7 @@
           <a:bodyPr wrap="square" lIns="0" tIns="0" rIns="0" bIns="0" rtlCol="0" anchor="ctr"/>
           <a:lstStyle/>
           <a:p>
-            <a:pPr indent="0" marL="0">
+            <a:pPr marL="0" indent="0">
               <a:buNone/>
             </a:pPr>
             <a:r>
@@ -8597,7 +8449,7 @@
           <a:bodyPr wrap="square" lIns="0" tIns="0" rIns="0" bIns="0" rtlCol="0" anchor="ctr"/>
           <a:lstStyle/>
           <a:p>
-            <a:pPr indent="0" marL="0">
+            <a:pPr marL="0" indent="0">
               <a:lnSpc>
                 <a:spcPct val="110000"/>
               </a:lnSpc>
@@ -8617,7 +8469,7 @@
             <a:endParaRPr lang="en-US" sz="1200" dirty="0"/>
           </a:p>
           <a:p>
-            <a:pPr indent="0" marL="0">
+            <a:pPr marL="0" indent="0">
               <a:lnSpc>
                 <a:spcPct val="110000"/>
               </a:lnSpc>
@@ -8637,7 +8489,7 @@
             <a:endParaRPr lang="en-US" sz="1200" dirty="0"/>
           </a:p>
           <a:p>
-            <a:pPr indent="0" marL="0">
+            <a:pPr marL="0" indent="0">
               <a:lnSpc>
                 <a:spcPct val="110000"/>
               </a:lnSpc>
@@ -8646,7 +8498,7 @@
             <a:endParaRPr lang="en-US" sz="1200" dirty="0"/>
           </a:p>
           <a:p>
-            <a:pPr indent="0" marL="0">
+            <a:pPr marL="0" indent="0">
               <a:lnSpc>
                 <a:spcPct val="110000"/>
               </a:lnSpc>
@@ -8666,7 +8518,7 @@
             <a:endParaRPr lang="en-US" sz="1200" dirty="0"/>
           </a:p>
           <a:p>
-            <a:pPr indent="0" marL="0">
+            <a:pPr marL="0" indent="0">
               <a:lnSpc>
                 <a:spcPct val="110000"/>
               </a:lnSpc>
@@ -8686,7 +8538,7 @@
             <a:endParaRPr lang="en-US" sz="1200" dirty="0"/>
           </a:p>
           <a:p>
-            <a:pPr indent="0" marL="0">
+            <a:pPr marL="0" indent="0">
               <a:lnSpc>
                 <a:spcPct val="110000"/>
               </a:lnSpc>
@@ -8695,7 +8547,7 @@
             <a:endParaRPr lang="en-US" sz="1200" dirty="0"/>
           </a:p>
           <a:p>
-            <a:pPr indent="0" marL="0">
+            <a:pPr marL="0" indent="0">
               <a:lnSpc>
                 <a:spcPct val="110000"/>
               </a:lnSpc>
@@ -8715,7 +8567,7 @@
             <a:endParaRPr lang="en-US" sz="1200" dirty="0"/>
           </a:p>
           <a:p>
-            <a:pPr indent="0" marL="0">
+            <a:pPr marL="0" indent="0">
               <a:lnSpc>
                 <a:spcPct val="110000"/>
               </a:lnSpc>
@@ -8735,7 +8587,7 @@
             <a:endParaRPr lang="en-US" sz="1200" dirty="0"/>
           </a:p>
           <a:p>
-            <a:pPr indent="0" marL="0">
+            <a:pPr marL="0" indent="0">
               <a:lnSpc>
                 <a:spcPct val="110000"/>
               </a:lnSpc>
@@ -8744,7 +8596,7 @@
             <a:endParaRPr lang="en-US" sz="1200" dirty="0"/>
           </a:p>
           <a:p>
-            <a:pPr indent="0" marL="0">
+            <a:pPr marL="0" indent="0">
               <a:lnSpc>
                 <a:spcPct val="110000"/>
               </a:lnSpc>
@@ -8764,7 +8616,7 @@
             <a:endParaRPr lang="en-US" sz="1200" dirty="0"/>
           </a:p>
           <a:p>
-            <a:pPr indent="0" marL="0">
+            <a:pPr marL="0" indent="0">
               <a:lnSpc>
                 <a:spcPct val="110000"/>
               </a:lnSpc>
@@ -8801,6 +8653,7 @@
         <a:solidFill>
           <a:srgbClr val="EDF2F4"/>
         </a:solidFill>
+        <a:effectLst/>
       </p:bgPr>
     </p:bg>
     <p:spTree>
@@ -8838,7 +8691,7 @@
           <a:bodyPr wrap="square" lIns="0" tIns="0" rIns="0" bIns="0" rtlCol="0" anchor="ctr"/>
           <a:lstStyle/>
           <a:p>
-            <a:pPr indent="0" marL="0">
+            <a:pPr marL="0" indent="0">
               <a:buNone/>
             </a:pPr>
             <a:r>
@@ -8895,7 +8748,7 @@
           </a:solidFill>
           <a:ln/>
           <a:effectLst>
-            <a:outerShdw sx="100000" sy="100000" kx="0" ky="0" algn="bl" rotWithShape="0" blurRad="76200" dist="25400" dir="8100000">
+            <a:outerShdw blurRad="76200" dist="25400" dir="8100000" algn="bl" rotWithShape="0">
               <a:srgbClr val="000000">
                 <a:alpha val="10000"/>
               </a:srgbClr>
@@ -8944,7 +8797,7 @@
           <a:bodyPr wrap="square" lIns="0" tIns="0" rIns="0" bIns="0" rtlCol="0" anchor="ctr"/>
           <a:lstStyle/>
           <a:p>
-            <a:pPr indent="0" marL="0">
+            <a:pPr marL="0" indent="0">
               <a:buNone/>
             </a:pPr>
             <a:r>
@@ -8983,7 +8836,7 @@
           <a:bodyPr wrap="square" lIns="0" tIns="0" rIns="0" bIns="0" rtlCol="0" anchor="ctr"/>
           <a:lstStyle/>
           <a:p>
-            <a:pPr indent="0" marL="0">
+            <a:pPr marL="0" indent="0">
               <a:lnSpc>
                 <a:spcPct val="160000"/>
               </a:lnSpc>
@@ -9003,7 +8856,7 @@
             <a:endParaRPr lang="en-US" sz="1200" dirty="0"/>
           </a:p>
           <a:p>
-            <a:pPr indent="0" marL="0">
+            <a:pPr marL="0" indent="0">
               <a:lnSpc>
                 <a:spcPct val="160000"/>
               </a:lnSpc>
@@ -9023,7 +8876,7 @@
             <a:endParaRPr lang="en-US" sz="1200" dirty="0"/>
           </a:p>
           <a:p>
-            <a:pPr indent="0" marL="0">
+            <a:pPr marL="0" indent="0">
               <a:lnSpc>
                 <a:spcPct val="160000"/>
               </a:lnSpc>
@@ -9043,7 +8896,7 @@
             <a:endParaRPr lang="en-US" sz="1200" dirty="0"/>
           </a:p>
           <a:p>
-            <a:pPr indent="0" marL="0">
+            <a:pPr marL="0" indent="0">
               <a:lnSpc>
                 <a:spcPct val="160000"/>
               </a:lnSpc>
@@ -9063,7 +8916,7 @@
             <a:endParaRPr lang="en-US" sz="1200" dirty="0"/>
           </a:p>
           <a:p>
-            <a:pPr indent="0" marL="0">
+            <a:pPr marL="0" indent="0">
               <a:lnSpc>
                 <a:spcPct val="160000"/>
               </a:lnSpc>
@@ -9083,7 +8936,7 @@
             <a:endParaRPr lang="en-US" sz="1200" dirty="0"/>
           </a:p>
           <a:p>
-            <a:pPr indent="0" marL="0">
+            <a:pPr marL="0" indent="0">
               <a:lnSpc>
                 <a:spcPct val="160000"/>
               </a:lnSpc>
@@ -9123,7 +8976,7 @@
           </a:solidFill>
           <a:ln/>
           <a:effectLst>
-            <a:outerShdw sx="100000" sy="100000" kx="0" ky="0" algn="bl" rotWithShape="0" blurRad="76200" dist="25400" dir="8100000">
+            <a:outerShdw blurRad="76200" dist="25400" dir="8100000" algn="bl" rotWithShape="0">
               <a:srgbClr val="000000">
                 <a:alpha val="10000"/>
               </a:srgbClr>
@@ -9172,7 +9025,7 @@
           <a:bodyPr wrap="square" lIns="0" tIns="0" rIns="0" bIns="0" rtlCol="0" anchor="ctr"/>
           <a:lstStyle/>
           <a:p>
-            <a:pPr indent="0" marL="0">
+            <a:pPr marL="0" indent="0">
               <a:buNone/>
             </a:pPr>
             <a:r>
@@ -9211,7 +9064,7 @@
           <a:bodyPr wrap="square" lIns="0" tIns="0" rIns="0" bIns="0" rtlCol="0" anchor="ctr"/>
           <a:lstStyle/>
           <a:p>
-            <a:pPr indent="0" marL="0">
+            <a:pPr marL="0" indent="0">
               <a:lnSpc>
                 <a:spcPct val="160000"/>
               </a:lnSpc>
@@ -9231,7 +9084,7 @@
             <a:endParaRPr lang="en-US" sz="1200" dirty="0"/>
           </a:p>
           <a:p>
-            <a:pPr indent="0" marL="0">
+            <a:pPr marL="0" indent="0">
               <a:lnSpc>
                 <a:spcPct val="160000"/>
               </a:lnSpc>
@@ -9251,7 +9104,7 @@
             <a:endParaRPr lang="en-US" sz="1200" dirty="0"/>
           </a:p>
           <a:p>
-            <a:pPr indent="0" marL="0">
+            <a:pPr marL="0" indent="0">
               <a:lnSpc>
                 <a:spcPct val="160000"/>
               </a:lnSpc>
@@ -9271,7 +9124,7 @@
             <a:endParaRPr lang="en-US" sz="1200" dirty="0"/>
           </a:p>
           <a:p>
-            <a:pPr indent="0" marL="0">
+            <a:pPr marL="0" indent="0">
               <a:lnSpc>
                 <a:spcPct val="160000"/>
               </a:lnSpc>
@@ -9291,7 +9144,7 @@
             <a:endParaRPr lang="en-US" sz="1200" dirty="0"/>
           </a:p>
           <a:p>
-            <a:pPr indent="0" marL="0">
+            <a:pPr marL="0" indent="0">
               <a:lnSpc>
                 <a:spcPct val="160000"/>
               </a:lnSpc>
@@ -9311,7 +9164,7 @@
             <a:endParaRPr lang="en-US" sz="1200" dirty="0"/>
           </a:p>
           <a:p>
-            <a:pPr indent="0" marL="0">
+            <a:pPr marL="0" indent="0">
               <a:lnSpc>
                 <a:spcPct val="160000"/>
               </a:lnSpc>
@@ -9633,4 +9486,299 @@
     </a:ext>
   </a:extLst>
 </a:theme>
+</file>
+
+<file path=ppt/theme/theme2.xml><?xml version="1.0" encoding="utf-8"?>
+<a:theme xmlns:a="http://schemas.openxmlformats.org/drawingml/2006/main" name="Office 主题​​">
+  <a:themeElements>
+    <a:clrScheme name="Office">
+      <a:dk1>
+        <a:sysClr val="windowText" lastClr="000000"/>
+      </a:dk1>
+      <a:lt1>
+        <a:sysClr val="window" lastClr="FFFFFF"/>
+      </a:lt1>
+      <a:dk2>
+        <a:srgbClr val="44546A"/>
+      </a:dk2>
+      <a:lt2>
+        <a:srgbClr val="E7E6E6"/>
+      </a:lt2>
+      <a:accent1>
+        <a:srgbClr val="4472C4"/>
+      </a:accent1>
+      <a:accent2>
+        <a:srgbClr val="ED7D31"/>
+      </a:accent2>
+      <a:accent3>
+        <a:srgbClr val="A5A5A5"/>
+      </a:accent3>
+      <a:accent4>
+        <a:srgbClr val="FFC000"/>
+      </a:accent4>
+      <a:accent5>
+        <a:srgbClr val="5B9BD5"/>
+      </a:accent5>
+      <a:accent6>
+        <a:srgbClr val="70AD47"/>
+      </a:accent6>
+      <a:hlink>
+        <a:srgbClr val="0563C1"/>
+      </a:hlink>
+      <a:folHlink>
+        <a:srgbClr val="954F72"/>
+      </a:folHlink>
+    </a:clrScheme>
+    <a:fontScheme name="Office">
+      <a:majorFont>
+        <a:latin typeface="等线 Light" panose="020F0302020204030204"/>
+        <a:ea typeface=""/>
+        <a:cs typeface=""/>
+        <a:font script="Jpan" typeface="游ゴシック Light"/>
+        <a:font script="Hang" typeface="맑은 고딕"/>
+        <a:font script="Hans" typeface="等线 Light"/>
+        <a:font script="Hant" typeface="新細明體"/>
+        <a:font script="Arab" typeface="Times New Roman"/>
+        <a:font script="Hebr" typeface="Times New Roman"/>
+        <a:font script="Thai" typeface="Angsana New"/>
+        <a:font script="Ethi" typeface="Nyala"/>
+        <a:font script="Beng" typeface="Vrinda"/>
+        <a:font script="Gujr" typeface="Shruti"/>
+        <a:font script="Khmr" typeface="MoolBoran"/>
+        <a:font script="Knda" typeface="Tunga"/>
+        <a:font script="Guru" typeface="Raavi"/>
+        <a:font script="Cans" typeface="Euphemia"/>
+        <a:font script="Cher" typeface="Plantagenet Cherokee"/>
+        <a:font script="Yiii" typeface="Microsoft Yi Baiti"/>
+        <a:font script="Tibt" typeface="Microsoft Himalaya"/>
+        <a:font script="Thaa" typeface="MV Boli"/>
+        <a:font script="Deva" typeface="Mangal"/>
+        <a:font script="Telu" typeface="Gautami"/>
+        <a:font script="Taml" typeface="Latha"/>
+        <a:font script="Syrc" typeface="Estrangelo Edessa"/>
+        <a:font script="Orya" typeface="Kalinga"/>
+        <a:font script="Mlym" typeface="Kartika"/>
+        <a:font script="Laoo" typeface="DokChampa"/>
+        <a:font script="Sinh" typeface="Iskoola Pota"/>
+        <a:font script="Mong" typeface="Mongolian Baiti"/>
+        <a:font script="Viet" typeface="Times New Roman"/>
+        <a:font script="Uigh" typeface="Microsoft Uighur"/>
+        <a:font script="Geor" typeface="Sylfaen"/>
+        <a:font script="Armn" typeface="Arial"/>
+        <a:font script="Bugi" typeface="Leelawadee UI"/>
+        <a:font script="Bopo" typeface="Microsoft JhengHei"/>
+        <a:font script="Java" typeface="Javanese Text"/>
+        <a:font script="Lisu" typeface="Segoe UI"/>
+        <a:font script="Mymr" typeface="Myanmar Text"/>
+        <a:font script="Nkoo" typeface="Ebrima"/>
+        <a:font script="Olck" typeface="Nirmala UI"/>
+        <a:font script="Osma" typeface="Ebrima"/>
+        <a:font script="Phag" typeface="Phagspa"/>
+        <a:font script="Syrn" typeface="Estrangelo Edessa"/>
+        <a:font script="Syrj" typeface="Estrangelo Edessa"/>
+        <a:font script="Syre" typeface="Estrangelo Edessa"/>
+        <a:font script="Sora" typeface="Nirmala UI"/>
+        <a:font script="Tale" typeface="Microsoft Tai Le"/>
+        <a:font script="Talu" typeface="Microsoft New Tai Lue"/>
+        <a:font script="Tfng" typeface="Ebrima"/>
+      </a:majorFont>
+      <a:minorFont>
+        <a:latin typeface="等线" panose="020F0502020204030204"/>
+        <a:ea typeface=""/>
+        <a:cs typeface=""/>
+        <a:font script="Jpan" typeface="游ゴシック"/>
+        <a:font script="Hang" typeface="맑은 고딕"/>
+        <a:font script="Hans" typeface="等线"/>
+        <a:font script="Hant" typeface="新細明體"/>
+        <a:font script="Arab" typeface="Arial"/>
+        <a:font script="Hebr" typeface="Arial"/>
+        <a:font script="Thai" typeface="Cordia New"/>
+        <a:font script="Ethi" typeface="Nyala"/>
+        <a:font script="Beng" typeface="Vrinda"/>
+        <a:font script="Gujr" typeface="Shruti"/>
+        <a:font script="Khmr" typeface="DaunPenh"/>
+        <a:font script="Knda" typeface="Tunga"/>
+        <a:font script="Guru" typeface="Raavi"/>
+        <a:font script="Cans" typeface="Euphemia"/>
+        <a:font script="Cher" typeface="Plantagenet Cherokee"/>
+        <a:font script="Yiii" typeface="Microsoft Yi Baiti"/>
+        <a:font script="Tibt" typeface="Microsoft Himalaya"/>
+        <a:font script="Thaa" typeface="MV Boli"/>
+        <a:font script="Deva" typeface="Mangal"/>
+        <a:font script="Telu" typeface="Gautami"/>
+        <a:font script="Taml" typeface="Latha"/>
+        <a:font script="Syrc" typeface="Estrangelo Edessa"/>
+        <a:font script="Orya" typeface="Kalinga"/>
+        <a:font script="Mlym" typeface="Kartika"/>
+        <a:font script="Laoo" typeface="DokChampa"/>
+        <a:font script="Sinh" typeface="Iskoola Pota"/>
+        <a:font script="Mong" typeface="Mongolian Baiti"/>
+        <a:font script="Viet" typeface="Arial"/>
+        <a:font script="Uigh" typeface="Microsoft Uighur"/>
+        <a:font script="Geor" typeface="Sylfaen"/>
+        <a:font script="Armn" typeface="Arial"/>
+        <a:font script="Bugi" typeface="Leelawadee UI"/>
+        <a:font script="Bopo" typeface="Microsoft JhengHei"/>
+        <a:font script="Java" typeface="Javanese Text"/>
+        <a:font script="Lisu" typeface="Segoe UI"/>
+        <a:font script="Mymr" typeface="Myanmar Text"/>
+        <a:font script="Nkoo" typeface="Ebrima"/>
+        <a:font script="Olck" typeface="Nirmala UI"/>
+        <a:font script="Osma" typeface="Ebrima"/>
+        <a:font script="Phag" typeface="Phagspa"/>
+        <a:font script="Syrn" typeface="Estrangelo Edessa"/>
+        <a:font script="Syrj" typeface="Estrangelo Edessa"/>
+        <a:font script="Syre" typeface="Estrangelo Edessa"/>
+        <a:font script="Sora" typeface="Nirmala UI"/>
+        <a:font script="Tale" typeface="Microsoft Tai Le"/>
+        <a:font script="Talu" typeface="Microsoft New Tai Lue"/>
+        <a:font script="Tfng" typeface="Ebrima"/>
+      </a:minorFont>
+    </a:fontScheme>
+    <a:fmtScheme name="Office">
+      <a:fillStyleLst>
+        <a:solidFill>
+          <a:schemeClr val="phClr"/>
+        </a:solidFill>
+        <a:gradFill rotWithShape="1">
+          <a:gsLst>
+            <a:gs pos="0">
+              <a:schemeClr val="phClr">
+                <a:lumMod val="110000"/>
+                <a:satMod val="105000"/>
+                <a:tint val="67000"/>
+              </a:schemeClr>
+            </a:gs>
+            <a:gs pos="50000">
+              <a:schemeClr val="phClr">
+                <a:lumMod val="105000"/>
+                <a:satMod val="103000"/>
+                <a:tint val="73000"/>
+              </a:schemeClr>
+            </a:gs>
+            <a:gs pos="100000">
+              <a:schemeClr val="phClr">
+                <a:lumMod val="105000"/>
+                <a:satMod val="109000"/>
+                <a:tint val="81000"/>
+              </a:schemeClr>
+            </a:gs>
+          </a:gsLst>
+          <a:lin ang="5400000" scaled="0"/>
+        </a:gradFill>
+        <a:gradFill rotWithShape="1">
+          <a:gsLst>
+            <a:gs pos="0">
+              <a:schemeClr val="phClr">
+                <a:satMod val="103000"/>
+                <a:lumMod val="102000"/>
+                <a:tint val="94000"/>
+              </a:schemeClr>
+            </a:gs>
+            <a:gs pos="50000">
+              <a:schemeClr val="phClr">
+                <a:satMod val="110000"/>
+                <a:lumMod val="100000"/>
+                <a:shade val="100000"/>
+              </a:schemeClr>
+            </a:gs>
+            <a:gs pos="100000">
+              <a:schemeClr val="phClr">
+                <a:lumMod val="99000"/>
+                <a:satMod val="120000"/>
+                <a:shade val="78000"/>
+              </a:schemeClr>
+            </a:gs>
+          </a:gsLst>
+          <a:lin ang="5400000" scaled="0"/>
+        </a:gradFill>
+      </a:fillStyleLst>
+      <a:lnStyleLst>
+        <a:ln w="6350" cap="flat" cmpd="sng" algn="ctr">
+          <a:solidFill>
+            <a:schemeClr val="phClr"/>
+          </a:solidFill>
+          <a:prstDash val="solid"/>
+          <a:miter lim="800000"/>
+        </a:ln>
+        <a:ln w="12700" cap="flat" cmpd="sng" algn="ctr">
+          <a:solidFill>
+            <a:schemeClr val="phClr"/>
+          </a:solidFill>
+          <a:prstDash val="solid"/>
+          <a:miter lim="800000"/>
+        </a:ln>
+        <a:ln w="19050" cap="flat" cmpd="sng" algn="ctr">
+          <a:solidFill>
+            <a:schemeClr val="phClr"/>
+          </a:solidFill>
+          <a:prstDash val="solid"/>
+          <a:miter lim="800000"/>
+        </a:ln>
+      </a:lnStyleLst>
+      <a:effectStyleLst>
+        <a:effectStyle>
+          <a:effectLst/>
+        </a:effectStyle>
+        <a:effectStyle>
+          <a:effectLst/>
+        </a:effectStyle>
+        <a:effectStyle>
+          <a:effectLst>
+            <a:outerShdw blurRad="57150" dist="19050" dir="5400000" algn="ctr" rotWithShape="0">
+              <a:srgbClr val="000000">
+                <a:alpha val="63000"/>
+              </a:srgbClr>
+            </a:outerShdw>
+          </a:effectLst>
+        </a:effectStyle>
+      </a:effectStyleLst>
+      <a:bgFillStyleLst>
+        <a:solidFill>
+          <a:schemeClr val="phClr"/>
+        </a:solidFill>
+        <a:solidFill>
+          <a:schemeClr val="phClr">
+            <a:tint val="95000"/>
+            <a:satMod val="170000"/>
+          </a:schemeClr>
+        </a:solidFill>
+        <a:gradFill rotWithShape="1">
+          <a:gsLst>
+            <a:gs pos="0">
+              <a:schemeClr val="phClr">
+                <a:tint val="93000"/>
+                <a:satMod val="150000"/>
+                <a:shade val="98000"/>
+                <a:lumMod val="102000"/>
+              </a:schemeClr>
+            </a:gs>
+            <a:gs pos="50000">
+              <a:schemeClr val="phClr">
+                <a:tint val="98000"/>
+                <a:satMod val="130000"/>
+                <a:shade val="90000"/>
+                <a:lumMod val="103000"/>
+              </a:schemeClr>
+            </a:gs>
+            <a:gs pos="100000">
+              <a:schemeClr val="phClr">
+                <a:shade val="63000"/>
+                <a:satMod val="120000"/>
+              </a:schemeClr>
+            </a:gs>
+          </a:gsLst>
+          <a:lin ang="5400000" scaled="0"/>
+        </a:gradFill>
+      </a:bgFillStyleLst>
+    </a:fmtScheme>
+  </a:themeElements>
+  <a:objectDefaults/>
+  <a:extraClrSchemeLst/>
+  <a:extLst>
+    <a:ext uri="{05A4C25C-085E-4340-85A3-A5531E510DB2}">
+      <thm15:themeFamily xmlns:thm15="http://schemas.microsoft.com/office/thememl/2012/main" name="Office Theme" id="{62F939B6-93AF-4DB8-9C6B-D6C7DFDC589F}" vid="{4A3C46E8-61CC-4603-A589-7422A47A8E4A}"/>
+    </a:ext>
+  </a:extLst>
+</a:theme>
 </file>